--- a/presentation_projet_tutoree.pptx
+++ b/presentation_projet_tutoree.pptx
@@ -3,20 +3,21 @@
 <p:presentation xmlns:a="http://schemas.openxmlformats.org/drawingml/2006/main" xmlns:p="http://schemas.openxmlformats.org/presentationml/2006/main" xmlns:r="http://schemas.openxmlformats.org/officeDocument/2006/relationships" xmlns:p14="http://schemas.microsoft.com/office/powerpoint/2010/main" xmlns:p15="http://schemas.microsoft.com/office/powerpoint/2012/main" xmlns:mc="http://schemas.openxmlformats.org/markup-compatibility/2006">
   <p:sldMasterIdLst>
     <p:sldMasterId id="2147483648" r:id="rId2"/>
+    <p:sldMasterId id="2147483650" r:id="rId3"/>
   </p:sldMasterIdLst>
   <p:notesMasterIdLst>
-    <p:notesMasterId r:id="rId3"/>
+    <p:notesMasterId r:id="rId4"/>
   </p:notesMasterIdLst>
   <p:sldIdLst>
-    <p:sldId id="256" r:id="rId4"/>
-    <p:sldId id="257" r:id="rId5"/>
-    <p:sldId id="258" r:id="rId6"/>
-    <p:sldId id="259" r:id="rId7"/>
-    <p:sldId id="260" r:id="rId8"/>
-    <p:sldId id="261" r:id="rId9"/>
-    <p:sldId id="262" r:id="rId10"/>
-    <p:sldId id="263" r:id="rId11"/>
-    <p:sldId id="264" r:id="rId12"/>
+    <p:sldId id="256" r:id="rId5"/>
+    <p:sldId id="257" r:id="rId6"/>
+    <p:sldId id="258" r:id="rId7"/>
+    <p:sldId id="259" r:id="rId8"/>
+    <p:sldId id="260" r:id="rId9"/>
+    <p:sldId id="261" r:id="rId10"/>
+    <p:sldId id="262" r:id="rId11"/>
+    <p:sldId id="263" r:id="rId12"/>
+    <p:sldId id="264" r:id="rId13"/>
   </p:sldIdLst>
   <p:sldSz cx="9144000" cy="5143500"/>
   <p:notesSz cx="5143500" cy="9144000"/>
@@ -42,7 +43,7 @@
       </p:grpSpPr>
       <p:sp>
         <p:nvSpPr>
-          <p:cNvPr id="2" name="PlaceHolder 1"/>
+          <p:cNvPr id="6" name="PlaceHolder 1"/>
           <p:cNvSpPr>
             <a:spLocks noGrp="1"/>
           </p:cNvSpPr>
@@ -52,8 +53,8 @@
         </p:nvSpPr>
         <p:spPr>
           <a:xfrm>
-            <a:off x="216000" y="812520"/>
-            <a:ext cx="7127280" cy="4008960"/>
+            <a:off x="0" y="812520"/>
+            <a:ext cx="0" cy="0"/>
           </a:xfrm>
           <a:prstGeom prst="rect">
             <a:avLst/>
@@ -76,7 +77,25 @@
                 </a:solidFill>
                 <a:latin typeface="Arial"/>
               </a:rPr>
-              <a:t>Click to move the slide</a:t>
+              <a:t>Click to </a:t>
+            </a:r>
+            <a:r>
+              <a:rPr b="0" lang="en-US" sz="4400" spc="-1" strike="noStrike">
+                <a:solidFill>
+                  <a:srgbClr val="000000"/>
+                </a:solidFill>
+                <a:latin typeface="Arial"/>
+              </a:rPr>
+              <a:t>move the </a:t>
+            </a:r>
+            <a:r>
+              <a:rPr b="0" lang="en-US" sz="4400" spc="-1" strike="noStrike">
+                <a:solidFill>
+                  <a:srgbClr val="000000"/>
+                </a:solidFill>
+                <a:latin typeface="Arial"/>
+              </a:rPr>
+              <a:t>slide</a:t>
             </a:r>
             <a:endParaRPr b="0" lang="en-US" sz="4400" spc="-1" strike="noStrike">
               <a:solidFill>
@@ -89,7 +108,7 @@
       </p:sp>
       <p:sp>
         <p:nvSpPr>
-          <p:cNvPr id="3" name="PlaceHolder 2"/>
+          <p:cNvPr id="7" name="PlaceHolder 2"/>
           <p:cNvSpPr>
             <a:spLocks noGrp="1"/>
           </p:cNvSpPr>
@@ -125,7 +144,88 @@
                 </a:solidFill>
                 <a:latin typeface="Arial"/>
               </a:rPr>
-              <a:t>Click to edit the notes format</a:t>
+              <a:t>Click </a:t>
+            </a:r>
+            <a:r>
+              <a:rPr b="0" lang="en-US" sz="2000" spc="-1" strike="noStrike">
+                <a:solidFill>
+                  <a:srgbClr val="000000"/>
+                </a:solidFill>
+                <a:latin typeface="Arial"/>
+              </a:rPr>
+              <a:t>to </a:t>
+            </a:r>
+            <a:r>
+              <a:rPr b="0" lang="en-US" sz="2000" spc="-1" strike="noStrike">
+                <a:solidFill>
+                  <a:srgbClr val="000000"/>
+                </a:solidFill>
+                <a:latin typeface="Arial"/>
+              </a:rPr>
+              <a:t>edi</a:t>
+            </a:r>
+            <a:r>
+              <a:rPr b="0" lang="en-US" sz="2000" spc="-1" strike="noStrike">
+                <a:solidFill>
+                  <a:srgbClr val="000000"/>
+                </a:solidFill>
+                <a:latin typeface="Arial"/>
+              </a:rPr>
+              <a:t>t </a:t>
+            </a:r>
+            <a:r>
+              <a:rPr b="0" lang="en-US" sz="2000" spc="-1" strike="noStrike">
+                <a:solidFill>
+                  <a:srgbClr val="000000"/>
+                </a:solidFill>
+                <a:latin typeface="Arial"/>
+              </a:rPr>
+              <a:t>the </a:t>
+            </a:r>
+            <a:r>
+              <a:rPr b="0" lang="en-US" sz="2000" spc="-1" strike="noStrike">
+                <a:solidFill>
+                  <a:srgbClr val="000000"/>
+                </a:solidFill>
+                <a:latin typeface="Arial"/>
+              </a:rPr>
+              <a:t>not</a:t>
+            </a:r>
+            <a:r>
+              <a:rPr b="0" lang="en-US" sz="2000" spc="-1" strike="noStrike">
+                <a:solidFill>
+                  <a:srgbClr val="000000"/>
+                </a:solidFill>
+                <a:latin typeface="Arial"/>
+              </a:rPr>
+              <a:t>es </a:t>
+            </a:r>
+            <a:r>
+              <a:rPr b="0" lang="en-US" sz="2000" spc="-1" strike="noStrike">
+                <a:solidFill>
+                  <a:srgbClr val="000000"/>
+                </a:solidFill>
+                <a:latin typeface="Arial"/>
+              </a:rPr>
+              <a:t>for</a:t>
+            </a:r>
+            <a:r>
+              <a:rPr b="0" lang="en-US" sz="2000" spc="-1" strike="noStrike">
+                <a:solidFill>
+                  <a:srgbClr val="000000"/>
+                </a:solidFill>
+                <a:latin typeface="Arial"/>
+              </a:rPr>
+              <a:t>ma</a:t>
+            </a:r>
+            <a:r>
+              <a:rPr b="0" lang="en-US" sz="2000" spc="-1" strike="noStrike">
+                <a:solidFill>
+                  <a:srgbClr val="000000"/>
+                </a:solidFill>
+                <a:latin typeface="Arial"/>
+              </a:rPr>
+              <a:t>t</a:t>
             </a:r>
             <a:endParaRPr b="0" lang="en-US" sz="2000" spc="-1" strike="noStrike">
               <a:solidFill>
@@ -138,7 +238,7 @@
       </p:sp>
       <p:sp>
         <p:nvSpPr>
-          <p:cNvPr id="4" name="PlaceHolder 3"/>
+          <p:cNvPr id="8" name="PlaceHolder 3"/>
           <p:cNvSpPr>
             <a:spLocks noGrp="1"/>
           </p:cNvSpPr>
@@ -187,7 +287,7 @@
       </p:sp>
       <p:sp>
         <p:nvSpPr>
-          <p:cNvPr id="5" name="PlaceHolder 4"/>
+          <p:cNvPr id="9" name="PlaceHolder 4"/>
           <p:cNvSpPr>
             <a:spLocks noGrp="1"/>
           </p:cNvSpPr>
@@ -247,7 +347,7 @@
       </p:sp>
       <p:sp>
         <p:nvSpPr>
-          <p:cNvPr id="6" name="PlaceHolder 5"/>
+          <p:cNvPr id="10" name="PlaceHolder 5"/>
           <p:cNvSpPr>
             <a:spLocks noGrp="1"/>
           </p:cNvSpPr>
@@ -307,7 +407,7 @@
       </p:sp>
       <p:sp>
         <p:nvSpPr>
-          <p:cNvPr id="7" name="PlaceHolder 6"/>
+          <p:cNvPr id="11" name="PlaceHolder 6"/>
           <p:cNvSpPr>
             <a:spLocks noGrp="1"/>
           </p:cNvSpPr>
@@ -347,7 +447,7 @@
             <a:pPr indent="0" algn="r">
               <a:buNone/>
             </a:pPr>
-            <a:fld id="{277B54C7-869F-4C13-AA27-85B82783D510}" type="slidenum">
+            <a:fld id="{C0BC2EA3-5C6B-4ED1-A2FF-D966761A0873}" type="slidenum">
               <a:rPr b="0" lang="en-US" sz="1400" spc="-1" strike="noStrike">
                 <a:solidFill>
                   <a:srgbClr val="000000"/>
@@ -401,7 +501,7 @@
         <p:spPr>
           <a:xfrm>
             <a:off x="685800" y="1143000"/>
-            <a:ext cx="5485680" cy="3085560"/>
+            <a:ext cx="5484960" cy="3084840"/>
           </a:xfrm>
           <a:prstGeom prst="rect">
             <a:avLst/>
@@ -424,7 +524,7 @@
         <p:spPr>
           <a:xfrm>
             <a:off x="685800" y="4400640"/>
-            <a:ext cx="5485680" cy="3599640"/>
+            <a:ext cx="5484960" cy="3598920"/>
           </a:xfrm>
           <a:prstGeom prst="rect">
             <a:avLst/>
@@ -439,9 +539,24 @@
             <a:noAutofit/>
           </a:bodyPr>
           <a:p>
-            <a:pPr marL="216000" indent="-216000">
+            <a:pPr marL="216000" indent="0">
+              <a:lnSpc>
+                <a:spcPct val="100000"/>
+              </a:lnSpc>
               <a:buNone/>
-            </a:pPr>
+              <a:tabLst>
+                <a:tab algn="l" pos="0"/>
+              </a:tabLst>
+            </a:pPr>
+            <a:r>
+              <a:rPr b="0" lang="en-US" sz="1800" spc="-1" strike="noStrike">
+                <a:solidFill>
+                  <a:srgbClr val="000000"/>
+                </a:solidFill>
+                <a:latin typeface="Arial"/>
+              </a:rPr>
+              <a:t>Salama eh</a:t>
+            </a:r>
             <a:endParaRPr b="0" lang="en-US" sz="1800" spc="-1" strike="noStrike">
               <a:solidFill>
                 <a:srgbClr val="000000"/>
@@ -464,7 +579,7 @@
         <p:spPr>
           <a:xfrm>
             <a:off x="3884760" y="8685360"/>
-            <a:ext cx="2971080" cy="457920"/>
+            <a:ext cx="2970360" cy="457200"/>
           </a:xfrm>
           <a:prstGeom prst="rect">
             <a:avLst/>
@@ -506,7 +621,7 @@
                 <a:tab algn="l" pos="0"/>
               </a:tabLst>
             </a:pPr>
-            <a:fld id="{65D1827A-EC34-4828-8306-EBF6232A8EF6}" type="slidenum">
+            <a:fld id="{BB280BC1-81CC-441B-B993-7D35A3CE2DF1}" type="slidenum">
               <a:rPr b="0" lang="en-US" sz="1200" spc="-1" strike="noStrike">
                 <a:solidFill>
                   <a:schemeClr val="dk1"/>
@@ -560,7 +675,7 @@
         <p:spPr>
           <a:xfrm>
             <a:off x="685800" y="1143000"/>
-            <a:ext cx="5485680" cy="3085560"/>
+            <a:ext cx="5484960" cy="3084840"/>
           </a:xfrm>
           <a:prstGeom prst="rect">
             <a:avLst/>
@@ -583,7 +698,7 @@
         <p:spPr>
           <a:xfrm>
             <a:off x="685800" y="4400640"/>
-            <a:ext cx="5485680" cy="3599640"/>
+            <a:ext cx="5484960" cy="3598920"/>
           </a:xfrm>
           <a:prstGeom prst="rect">
             <a:avLst/>
@@ -623,7 +738,7 @@
         <p:spPr>
           <a:xfrm>
             <a:off x="3884760" y="8685360"/>
-            <a:ext cx="2971080" cy="457920"/>
+            <a:ext cx="2970360" cy="457200"/>
           </a:xfrm>
           <a:prstGeom prst="rect">
             <a:avLst/>
@@ -665,7 +780,7 @@
                 <a:tab algn="l" pos="0"/>
               </a:tabLst>
             </a:pPr>
-            <a:fld id="{8937EEAC-E63D-4317-82CE-D89AD6D10D2A}" type="slidenum">
+            <a:fld id="{272BB707-F845-4779-9D06-D113968998F5}" type="slidenum">
               <a:rPr b="0" lang="en-US" sz="1200" spc="-1" strike="noStrike">
                 <a:solidFill>
                   <a:schemeClr val="dk1"/>
@@ -719,7 +834,7 @@
         <p:spPr>
           <a:xfrm>
             <a:off x="685800" y="1143000"/>
-            <a:ext cx="5485680" cy="3085560"/>
+            <a:ext cx="5484960" cy="3084840"/>
           </a:xfrm>
           <a:prstGeom prst="rect">
             <a:avLst/>
@@ -742,7 +857,7 @@
         <p:spPr>
           <a:xfrm>
             <a:off x="685800" y="4400640"/>
-            <a:ext cx="5485680" cy="3599640"/>
+            <a:ext cx="5484960" cy="3598920"/>
           </a:xfrm>
           <a:prstGeom prst="rect">
             <a:avLst/>
@@ -757,9 +872,24 @@
             <a:noAutofit/>
           </a:bodyPr>
           <a:p>
-            <a:pPr marL="216000" indent="-216000">
+            <a:pPr marL="216000" indent="0">
+              <a:lnSpc>
+                <a:spcPct val="100000"/>
+              </a:lnSpc>
               <a:buNone/>
-            </a:pPr>
+              <a:tabLst>
+                <a:tab algn="l" pos="0"/>
+              </a:tabLst>
+            </a:pPr>
+            <a:r>
+              <a:rPr b="0" lang="en-US" sz="1800" spc="-1" strike="noStrike">
+                <a:solidFill>
+                  <a:srgbClr val="000000"/>
+                </a:solidFill>
+                <a:latin typeface="Arial"/>
+              </a:rPr>
+              <a:t>dsdsdsdsdsdsdsdrgrgfgfgfg</a:t>
+            </a:r>
             <a:endParaRPr b="0" lang="en-US" sz="1800" spc="-1" strike="noStrike">
               <a:solidFill>
                 <a:srgbClr val="000000"/>
@@ -782,7 +912,7 @@
         <p:spPr>
           <a:xfrm>
             <a:off x="3884760" y="8685360"/>
-            <a:ext cx="2971080" cy="457920"/>
+            <a:ext cx="2970360" cy="457200"/>
           </a:xfrm>
           <a:prstGeom prst="rect">
             <a:avLst/>
@@ -824,7 +954,7 @@
                 <a:tab algn="l" pos="0"/>
               </a:tabLst>
             </a:pPr>
-            <a:fld id="{BE743AB8-1748-44F9-925A-68BC34DBA75A}" type="slidenum">
+            <a:fld id="{CD0B52F5-C6DF-41DA-8D7B-2651B1A3504C}" type="slidenum">
               <a:rPr b="0" lang="en-US" sz="1200" spc="-1" strike="noStrike">
                 <a:solidFill>
                   <a:schemeClr val="dk1"/>
@@ -878,7 +1008,7 @@
         <p:spPr>
           <a:xfrm>
             <a:off x="685800" y="1143000"/>
-            <a:ext cx="5485680" cy="3085560"/>
+            <a:ext cx="5484960" cy="3084840"/>
           </a:xfrm>
           <a:prstGeom prst="rect">
             <a:avLst/>
@@ -901,7 +1031,7 @@
         <p:spPr>
           <a:xfrm>
             <a:off x="685800" y="4400640"/>
-            <a:ext cx="5485680" cy="3599640"/>
+            <a:ext cx="5484960" cy="3598920"/>
           </a:xfrm>
           <a:prstGeom prst="rect">
             <a:avLst/>
@@ -941,7 +1071,7 @@
         <p:spPr>
           <a:xfrm>
             <a:off x="3884760" y="8685360"/>
-            <a:ext cx="2971080" cy="457920"/>
+            <a:ext cx="2970360" cy="457200"/>
           </a:xfrm>
           <a:prstGeom prst="rect">
             <a:avLst/>
@@ -983,7 +1113,7 @@
                 <a:tab algn="l" pos="0"/>
               </a:tabLst>
             </a:pPr>
-            <a:fld id="{13C38416-C130-4171-B1A3-13B6FC402143}" type="slidenum">
+            <a:fld id="{D0E57D4D-7868-4F9F-ADB1-026FD84EF6AD}" type="slidenum">
               <a:rPr b="0" lang="en-US" sz="1200" spc="-1" strike="noStrike">
                 <a:solidFill>
                   <a:schemeClr val="dk1"/>
@@ -1037,7 +1167,7 @@
         <p:spPr>
           <a:xfrm>
             <a:off x="685800" y="1143000"/>
-            <a:ext cx="5485680" cy="3085560"/>
+            <a:ext cx="5484960" cy="3084840"/>
           </a:xfrm>
           <a:prstGeom prst="rect">
             <a:avLst/>
@@ -1060,7 +1190,7 @@
         <p:spPr>
           <a:xfrm>
             <a:off x="685800" y="4400640"/>
-            <a:ext cx="5485680" cy="3599640"/>
+            <a:ext cx="5484960" cy="3598920"/>
           </a:xfrm>
           <a:prstGeom prst="rect">
             <a:avLst/>
@@ -1100,7 +1230,7 @@
         <p:spPr>
           <a:xfrm>
             <a:off x="3884760" y="8685360"/>
-            <a:ext cx="2971080" cy="457920"/>
+            <a:ext cx="2970360" cy="457200"/>
           </a:xfrm>
           <a:prstGeom prst="rect">
             <a:avLst/>
@@ -1142,7 +1272,7 @@
                 <a:tab algn="l" pos="0"/>
               </a:tabLst>
             </a:pPr>
-            <a:fld id="{6D1D17A4-6339-4D3E-8173-858ED155E0B0}" type="slidenum">
+            <a:fld id="{FC2E7CED-2621-4E34-AEA7-4039C7D88634}" type="slidenum">
               <a:rPr b="0" lang="en-US" sz="1200" spc="-1" strike="noStrike">
                 <a:solidFill>
                   <a:schemeClr val="dk1"/>
@@ -1196,7 +1326,7 @@
         <p:spPr>
           <a:xfrm>
             <a:off x="685800" y="1143000"/>
-            <a:ext cx="5485680" cy="3085560"/>
+            <a:ext cx="5484960" cy="3084840"/>
           </a:xfrm>
           <a:prstGeom prst="rect">
             <a:avLst/>
@@ -1219,7 +1349,7 @@
         <p:spPr>
           <a:xfrm>
             <a:off x="685800" y="4400640"/>
-            <a:ext cx="5485680" cy="3599640"/>
+            <a:ext cx="5484960" cy="3598920"/>
           </a:xfrm>
           <a:prstGeom prst="rect">
             <a:avLst/>
@@ -1259,7 +1389,7 @@
         <p:spPr>
           <a:xfrm>
             <a:off x="3884760" y="8685360"/>
-            <a:ext cx="2971080" cy="457920"/>
+            <a:ext cx="2970360" cy="457200"/>
           </a:xfrm>
           <a:prstGeom prst="rect">
             <a:avLst/>
@@ -1301,7 +1431,7 @@
                 <a:tab algn="l" pos="0"/>
               </a:tabLst>
             </a:pPr>
-            <a:fld id="{336A3475-2A30-49BB-AB13-A8B5D01B44CA}" type="slidenum">
+            <a:fld id="{5A52661F-C2D8-4CB6-A6B4-8A29E9C730AD}" type="slidenum">
               <a:rPr b="0" lang="en-US" sz="1200" spc="-1" strike="noStrike">
                 <a:solidFill>
                   <a:schemeClr val="dk1"/>
@@ -1355,7 +1485,7 @@
         <p:spPr>
           <a:xfrm>
             <a:off x="685800" y="1143000"/>
-            <a:ext cx="5485680" cy="3085560"/>
+            <a:ext cx="5484960" cy="3084840"/>
           </a:xfrm>
           <a:prstGeom prst="rect">
             <a:avLst/>
@@ -1378,7 +1508,7 @@
         <p:spPr>
           <a:xfrm>
             <a:off x="685800" y="4400640"/>
-            <a:ext cx="5485680" cy="3599640"/>
+            <a:ext cx="5484960" cy="3598920"/>
           </a:xfrm>
           <a:prstGeom prst="rect">
             <a:avLst/>
@@ -1418,7 +1548,7 @@
         <p:spPr>
           <a:xfrm>
             <a:off x="3884760" y="8685360"/>
-            <a:ext cx="2971080" cy="457920"/>
+            <a:ext cx="2970360" cy="457200"/>
           </a:xfrm>
           <a:prstGeom prst="rect">
             <a:avLst/>
@@ -1460,7 +1590,7 @@
                 <a:tab algn="l" pos="0"/>
               </a:tabLst>
             </a:pPr>
-            <a:fld id="{D2FD7D34-B559-47FF-B24C-B6CCE8F2EDDE}" type="slidenum">
+            <a:fld id="{0057ED97-2B44-4FAF-B32A-1F8B5846EE6A}" type="slidenum">
               <a:rPr b="0" lang="en-US" sz="1200" spc="-1" strike="noStrike">
                 <a:solidFill>
                   <a:schemeClr val="dk1"/>
@@ -1514,7 +1644,7 @@
         <p:spPr>
           <a:xfrm>
             <a:off x="685800" y="1143000"/>
-            <a:ext cx="5485680" cy="3085560"/>
+            <a:ext cx="5484960" cy="3084840"/>
           </a:xfrm>
           <a:prstGeom prst="rect">
             <a:avLst/>
@@ -1537,7 +1667,7 @@
         <p:spPr>
           <a:xfrm>
             <a:off x="685800" y="4400640"/>
-            <a:ext cx="5485680" cy="3599640"/>
+            <a:ext cx="5484960" cy="3598920"/>
           </a:xfrm>
           <a:prstGeom prst="rect">
             <a:avLst/>
@@ -1577,7 +1707,7 @@
         <p:spPr>
           <a:xfrm>
             <a:off x="3884760" y="8685360"/>
-            <a:ext cx="2971080" cy="457920"/>
+            <a:ext cx="2970360" cy="457200"/>
           </a:xfrm>
           <a:prstGeom prst="rect">
             <a:avLst/>
@@ -1619,7 +1749,7 @@
                 <a:tab algn="l" pos="0"/>
               </a:tabLst>
             </a:pPr>
-            <a:fld id="{345C6B61-20DF-4E14-951B-C51C7584AB59}" type="slidenum">
+            <a:fld id="{092678D1-B974-4EDD-B26D-F13A00709758}" type="slidenum">
               <a:rPr b="0" lang="en-US" sz="1200" spc="-1" strike="noStrike">
                 <a:solidFill>
                   <a:schemeClr val="dk1"/>
@@ -1673,7 +1803,7 @@
         <p:spPr>
           <a:xfrm>
             <a:off x="685800" y="1143000"/>
-            <a:ext cx="5485680" cy="3085560"/>
+            <a:ext cx="5484960" cy="3084840"/>
           </a:xfrm>
           <a:prstGeom prst="rect">
             <a:avLst/>
@@ -1696,7 +1826,7 @@
         <p:spPr>
           <a:xfrm>
             <a:off x="685800" y="4400640"/>
-            <a:ext cx="5485680" cy="3599640"/>
+            <a:ext cx="5484960" cy="3598920"/>
           </a:xfrm>
           <a:prstGeom prst="rect">
             <a:avLst/>
@@ -1711,9 +1841,24 @@
             <a:noAutofit/>
           </a:bodyPr>
           <a:p>
-            <a:pPr marL="216000" indent="-216000">
+            <a:pPr marL="216000" indent="0">
+              <a:lnSpc>
+                <a:spcPct val="100000"/>
+              </a:lnSpc>
               <a:buNone/>
-            </a:pPr>
+              <a:tabLst>
+                <a:tab algn="l" pos="0"/>
+              </a:tabLst>
+            </a:pPr>
+            <a:r>
+              <a:rPr b="0" lang="en-US" sz="1800" spc="-1" strike="noStrike">
+                <a:solidFill>
+                  <a:srgbClr val="000000"/>
+                </a:solidFill>
+                <a:latin typeface="Arial"/>
+              </a:rPr>
+              <a:t>dfdfdfffffffffffffffffffffffffffffffffffffffffffffffffffffffffffffffffffffffffffffffffffffffffffffffffffffffffffffffffffffffffffffffffffffffffffffffffffffffffffffffffffffffffffffffffffffffffffffffffffffffff</a:t>
+            </a:r>
             <a:endParaRPr b="0" lang="en-US" sz="1800" spc="-1" strike="noStrike">
               <a:solidFill>
                 <a:srgbClr val="000000"/>
@@ -1736,7 +1881,7 @@
         <p:spPr>
           <a:xfrm>
             <a:off x="3884760" y="8685360"/>
-            <a:ext cx="2971080" cy="457920"/>
+            <a:ext cx="2970360" cy="457200"/>
           </a:xfrm>
           <a:prstGeom prst="rect">
             <a:avLst/>
@@ -1778,7 +1923,7 @@
                 <a:tab algn="l" pos="0"/>
               </a:tabLst>
             </a:pPr>
-            <a:fld id="{B65052CB-D57F-4DE3-8C4B-10E7565D2179}" type="slidenum">
+            <a:fld id="{415ADE30-0D14-4EAC-88AB-7AE5DEBCAEAE}" type="slidenum">
               <a:rPr b="0" lang="en-US" sz="1200" spc="-1" strike="noStrike">
                 <a:solidFill>
                   <a:schemeClr val="dk1"/>
@@ -1819,6 +1964,108 @@
           <a:chExt cx="0" cy="0"/>
         </a:xfrm>
       </p:grpSpPr>
+    </p:spTree>
+  </p:cSld>
+</p:sldLayout>
+</file>
+
+<file path=ppt/slideLayouts/slideLayout2.xml><?xml version="1.0" encoding="utf-8"?>
+<p:sldLayout xmlns:a="http://schemas.openxmlformats.org/drawingml/2006/main" xmlns:p="http://schemas.openxmlformats.org/presentationml/2006/main" xmlns:r="http://schemas.openxmlformats.org/officeDocument/2006/relationships" xmlns:p14="http://schemas.microsoft.com/office/powerpoint/2010/main" xmlns:p15="http://schemas.microsoft.com/office/powerpoint/2012/main" xmlns:mc="http://schemas.openxmlformats.org/markup-compatibility/2006" type="title" preserve="1">
+  <p:cSld name="Default">
+    <p:spTree>
+      <p:nvGrpSpPr>
+        <p:cNvPr id="1" name=""/>
+        <p:cNvGrpSpPr/>
+        <p:nvPr/>
+      </p:nvGrpSpPr>
+      <p:grpSpPr>
+        <a:xfrm>
+          <a:off x="0" y="0"/>
+          <a:ext cx="0" cy="0"/>
+          <a:chOff x="0" y="0"/>
+          <a:chExt cx="0" cy="0"/>
+        </a:xfrm>
+      </p:grpSpPr>
+      <p:sp>
+        <p:nvSpPr>
+          <p:cNvPr id="4" name="PlaceHolder 1"/>
+          <p:cNvSpPr>
+            <a:spLocks noGrp="1"/>
+          </p:cNvSpPr>
+          <p:nvPr>
+            <p:ph type="title"/>
+          </p:nvPr>
+        </p:nvSpPr>
+        <p:spPr>
+          <a:xfrm>
+            <a:off x="457200" y="205200"/>
+            <a:ext cx="8229240" cy="858600"/>
+          </a:xfrm>
+          <a:prstGeom prst="rect">
+            <a:avLst/>
+          </a:prstGeom>
+          <a:noFill/>
+          <a:ln w="0">
+            <a:noFill/>
+          </a:ln>
+        </p:spPr>
+        <p:txBody>
+          <a:bodyPr lIns="0" rIns="0" tIns="0" bIns="0" anchor="ctr">
+            <a:noAutofit/>
+          </a:bodyPr>
+          <a:p>
+            <a:pPr indent="0" algn="ctr">
+              <a:buNone/>
+            </a:pPr>
+            <a:endParaRPr b="0" lang="en-US" sz="4400" spc="-1" strike="noStrike">
+              <a:solidFill>
+                <a:srgbClr val="000000"/>
+              </a:solidFill>
+              <a:latin typeface="Arial"/>
+            </a:endParaRPr>
+          </a:p>
+        </p:txBody>
+      </p:sp>
+      <p:sp>
+        <p:nvSpPr>
+          <p:cNvPr id="5" name="PlaceHolder 2"/>
+          <p:cNvSpPr>
+            <a:spLocks noGrp="1"/>
+          </p:cNvSpPr>
+          <p:nvPr>
+            <p:ph type="subTitle"/>
+          </p:nvPr>
+        </p:nvSpPr>
+        <p:spPr>
+          <a:xfrm>
+            <a:off x="457200" y="1203480"/>
+            <a:ext cx="8229240" cy="2982960"/>
+          </a:xfrm>
+          <a:prstGeom prst="rect">
+            <a:avLst/>
+          </a:prstGeom>
+          <a:noFill/>
+          <a:ln w="0">
+            <a:noFill/>
+          </a:ln>
+        </p:spPr>
+        <p:txBody>
+          <a:bodyPr lIns="0" rIns="0" tIns="0" bIns="0" anchor="ctr">
+            <a:noAutofit/>
+          </a:bodyPr>
+          <a:p>
+            <a:pPr indent="0" algn="ctr">
+              <a:buNone/>
+            </a:pPr>
+            <a:endParaRPr b="0" lang="en-US" sz="3200" spc="-1" strike="noStrike">
+              <a:solidFill>
+                <a:srgbClr val="000000"/>
+              </a:solidFill>
+              <a:latin typeface="Arial"/>
+            </a:endParaRPr>
+          </a:p>
+        </p:txBody>
+      </p:sp>
     </p:spTree>
   </p:cSld>
 </p:sldLayout>
@@ -1886,7 +2133,16 @@
                 </a:solidFill>
                 <a:latin typeface="Arial"/>
               </a:rPr>
-              <a:t>Click to edit the title text format</a:t>
+              <a:t>Click to edit the </a:t>
+            </a:r>
+            <a:r>
+              <a:rPr b="0" lang="en-US" sz="4400" spc="-1" strike="noStrike">
+                <a:solidFill>
+                  <a:srgbClr val="000000"/>
+                </a:solidFill>
+                <a:latin typeface="Arial"/>
+              </a:rPr>
+              <a:t>title text format</a:t>
             </a:r>
             <a:endParaRPr b="0" lang="en-US" sz="4400" spc="-1" strike="noStrike">
               <a:solidFill>
@@ -2127,6 +2383,322 @@
   <p:clrMap bg1="lt1" bg2="lt2" tx1="dk1" tx2="dk2" accent1="accent1" accent2="accent2" accent3="accent3" accent4="accent4" accent5="accent5" accent6="accent6" hlink="hlink" folHlink="folHlink"/>
   <p:sldLayoutIdLst>
     <p:sldLayoutId id="2147483649" r:id="rId2"/>
+  </p:sldLayoutIdLst>
+</p:sldMaster>
+</file>
+
+<file path=ppt/slideMasters/slideMaster2.xml><?xml version="1.0" encoding="utf-8"?>
+<p:sldMaster xmlns:a="http://schemas.openxmlformats.org/drawingml/2006/main" xmlns:p="http://schemas.openxmlformats.org/presentationml/2006/main" xmlns:r="http://schemas.openxmlformats.org/officeDocument/2006/relationships" xmlns:p14="http://schemas.microsoft.com/office/powerpoint/2010/main" xmlns:p15="http://schemas.microsoft.com/office/powerpoint/2012/main" xmlns:mc="http://schemas.openxmlformats.org/markup-compatibility/2006">
+  <p:cSld>
+    <p:bg>
+      <p:bgPr>
+        <a:solidFill>
+          <a:srgbClr val="ffffff"/>
+        </a:solidFill>
+      </p:bgPr>
+    </p:bg>
+    <p:spTree>
+      <p:nvGrpSpPr>
+        <p:cNvPr id="1" name=""/>
+        <p:cNvGrpSpPr/>
+        <p:nvPr/>
+      </p:nvGrpSpPr>
+      <p:grpSpPr>
+        <a:xfrm>
+          <a:off x="0" y="0"/>
+          <a:ext cx="0" cy="0"/>
+          <a:chOff x="0" y="0"/>
+          <a:chExt cx="0" cy="0"/>
+        </a:xfrm>
+      </p:grpSpPr>
+      <p:sp>
+        <p:nvSpPr>
+          <p:cNvPr id="2" name="PlaceHolder 1"/>
+          <p:cNvSpPr>
+            <a:spLocks noGrp="1"/>
+          </p:cNvSpPr>
+          <p:nvPr>
+            <p:ph type="title"/>
+          </p:nvPr>
+        </p:nvSpPr>
+        <p:spPr>
+          <a:xfrm>
+            <a:off x="457200" y="205200"/>
+            <a:ext cx="8228880" cy="858240"/>
+          </a:xfrm>
+          <a:prstGeom prst="rect">
+            <a:avLst/>
+          </a:prstGeom>
+          <a:noFill/>
+          <a:ln w="0">
+            <a:noFill/>
+          </a:ln>
+        </p:spPr>
+        <p:txBody>
+          <a:bodyPr lIns="0" rIns="0" tIns="0" bIns="0" anchor="ctr">
+            <a:noAutofit/>
+          </a:bodyPr>
+          <a:p>
+            <a:pPr indent="0">
+              <a:buNone/>
+            </a:pPr>
+            <a:r>
+              <a:rPr b="0" lang="en-US" sz="1800" spc="-1" strike="noStrike">
+                <a:solidFill>
+                  <a:srgbClr val="000000"/>
+                </a:solidFill>
+                <a:latin typeface="Arial"/>
+              </a:rPr>
+              <a:t>Click to edit the title </a:t>
+            </a:r>
+            <a:r>
+              <a:rPr b="0" lang="en-US" sz="1800" spc="-1" strike="noStrike">
+                <a:solidFill>
+                  <a:srgbClr val="000000"/>
+                </a:solidFill>
+                <a:latin typeface="Arial"/>
+              </a:rPr>
+              <a:t>text format</a:t>
+            </a:r>
+            <a:endParaRPr b="0" lang="en-US" sz="1800" spc="-1" strike="noStrike">
+              <a:solidFill>
+                <a:srgbClr val="000000"/>
+              </a:solidFill>
+              <a:latin typeface="Arial"/>
+            </a:endParaRPr>
+          </a:p>
+        </p:txBody>
+      </p:sp>
+      <p:sp>
+        <p:nvSpPr>
+          <p:cNvPr id="3" name="PlaceHolder 2"/>
+          <p:cNvSpPr>
+            <a:spLocks noGrp="1"/>
+          </p:cNvSpPr>
+          <p:nvPr>
+            <p:ph type="body"/>
+          </p:nvPr>
+        </p:nvSpPr>
+        <p:spPr>
+          <a:xfrm>
+            <a:off x="457200" y="1203480"/>
+            <a:ext cx="8229240" cy="2982960"/>
+          </a:xfrm>
+          <a:prstGeom prst="rect">
+            <a:avLst/>
+          </a:prstGeom>
+          <a:noFill/>
+          <a:ln w="0">
+            <a:noFill/>
+          </a:ln>
+        </p:spPr>
+        <p:txBody>
+          <a:bodyPr lIns="0" rIns="0" tIns="0" bIns="0" anchor="t">
+            <a:normAutofit/>
+          </a:bodyPr>
+          <a:p>
+            <a:pPr marL="432000" indent="-324000">
+              <a:spcBef>
+                <a:spcPts val="1417"/>
+              </a:spcBef>
+              <a:buClr>
+                <a:srgbClr val="000000"/>
+              </a:buClr>
+              <a:buSzPct val="45000"/>
+              <a:buFont typeface="Wingdings" charset="2"/>
+              <a:buChar char=""/>
+            </a:pPr>
+            <a:r>
+              <a:rPr b="0" lang="en-US" sz="3200" spc="-1" strike="noStrike">
+                <a:solidFill>
+                  <a:srgbClr val="000000"/>
+                </a:solidFill>
+                <a:latin typeface="Arial"/>
+              </a:rPr>
+              <a:t>Click to edit the outline text format</a:t>
+            </a:r>
+            <a:endParaRPr b="0" lang="en-US" sz="3200" spc="-1" strike="noStrike">
+              <a:solidFill>
+                <a:srgbClr val="000000"/>
+              </a:solidFill>
+              <a:latin typeface="Arial"/>
+            </a:endParaRPr>
+          </a:p>
+          <a:p>
+            <a:pPr lvl="1" marL="864000" indent="-324000">
+              <a:spcBef>
+                <a:spcPts val="1134"/>
+              </a:spcBef>
+              <a:buClr>
+                <a:srgbClr val="000000"/>
+              </a:buClr>
+              <a:buSzPct val="75000"/>
+              <a:buFont typeface="Symbol" charset="2"/>
+              <a:buChar char=""/>
+            </a:pPr>
+            <a:r>
+              <a:rPr b="0" lang="en-US" sz="2800" spc="-1" strike="noStrike">
+                <a:solidFill>
+                  <a:srgbClr val="000000"/>
+                </a:solidFill>
+                <a:latin typeface="Arial"/>
+              </a:rPr>
+              <a:t>Second Outline Level</a:t>
+            </a:r>
+            <a:endParaRPr b="0" lang="en-US" sz="2800" spc="-1" strike="noStrike">
+              <a:solidFill>
+                <a:srgbClr val="000000"/>
+              </a:solidFill>
+              <a:latin typeface="Arial"/>
+            </a:endParaRPr>
+          </a:p>
+          <a:p>
+            <a:pPr lvl="2" marL="1296000" indent="-288000">
+              <a:spcBef>
+                <a:spcPts val="850"/>
+              </a:spcBef>
+              <a:buClr>
+                <a:srgbClr val="000000"/>
+              </a:buClr>
+              <a:buSzPct val="45000"/>
+              <a:buFont typeface="Wingdings" charset="2"/>
+              <a:buChar char=""/>
+            </a:pPr>
+            <a:r>
+              <a:rPr b="0" lang="en-US" sz="2400" spc="-1" strike="noStrike">
+                <a:solidFill>
+                  <a:srgbClr val="000000"/>
+                </a:solidFill>
+                <a:latin typeface="Arial"/>
+              </a:rPr>
+              <a:t>Third Outline Level</a:t>
+            </a:r>
+            <a:endParaRPr b="0" lang="en-US" sz="2400" spc="-1" strike="noStrike">
+              <a:solidFill>
+                <a:srgbClr val="000000"/>
+              </a:solidFill>
+              <a:latin typeface="Arial"/>
+            </a:endParaRPr>
+          </a:p>
+          <a:p>
+            <a:pPr lvl="3" marL="1728000" indent="-216000">
+              <a:spcBef>
+                <a:spcPts val="567"/>
+              </a:spcBef>
+              <a:buClr>
+                <a:srgbClr val="000000"/>
+              </a:buClr>
+              <a:buSzPct val="75000"/>
+              <a:buFont typeface="Symbol" charset="2"/>
+              <a:buChar char=""/>
+            </a:pPr>
+            <a:r>
+              <a:rPr b="0" lang="en-US" sz="2000" spc="-1" strike="noStrike">
+                <a:solidFill>
+                  <a:srgbClr val="000000"/>
+                </a:solidFill>
+                <a:latin typeface="Arial"/>
+              </a:rPr>
+              <a:t>Fourth Outline Level</a:t>
+            </a:r>
+            <a:endParaRPr b="0" lang="en-US" sz="2000" spc="-1" strike="noStrike">
+              <a:solidFill>
+                <a:srgbClr val="000000"/>
+              </a:solidFill>
+              <a:latin typeface="Arial"/>
+            </a:endParaRPr>
+          </a:p>
+          <a:p>
+            <a:pPr lvl="4" marL="2160000" indent="-216000">
+              <a:spcBef>
+                <a:spcPts val="283"/>
+              </a:spcBef>
+              <a:buClr>
+                <a:srgbClr val="000000"/>
+              </a:buClr>
+              <a:buSzPct val="45000"/>
+              <a:buFont typeface="Wingdings" charset="2"/>
+              <a:buChar char=""/>
+            </a:pPr>
+            <a:r>
+              <a:rPr b="0" lang="en-US" sz="2000" spc="-1" strike="noStrike">
+                <a:solidFill>
+                  <a:srgbClr val="000000"/>
+                </a:solidFill>
+                <a:latin typeface="Arial"/>
+              </a:rPr>
+              <a:t>Fifth Outline Level</a:t>
+            </a:r>
+            <a:endParaRPr b="0" lang="en-US" sz="2000" spc="-1" strike="noStrike">
+              <a:solidFill>
+                <a:srgbClr val="000000"/>
+              </a:solidFill>
+              <a:latin typeface="Arial"/>
+            </a:endParaRPr>
+          </a:p>
+          <a:p>
+            <a:pPr lvl="5" marL="2592000" indent="-216000">
+              <a:spcBef>
+                <a:spcPts val="283"/>
+              </a:spcBef>
+              <a:buClr>
+                <a:srgbClr val="000000"/>
+              </a:buClr>
+              <a:buSzPct val="45000"/>
+              <a:buFont typeface="Wingdings" charset="2"/>
+              <a:buChar char=""/>
+            </a:pPr>
+            <a:r>
+              <a:rPr b="0" lang="en-US" sz="2000" spc="-1" strike="noStrike">
+                <a:solidFill>
+                  <a:srgbClr val="000000"/>
+                </a:solidFill>
+                <a:latin typeface="Arial"/>
+              </a:rPr>
+              <a:t>Sixth Outline Level</a:t>
+            </a:r>
+            <a:endParaRPr b="0" lang="en-US" sz="2000" spc="-1" strike="noStrike">
+              <a:solidFill>
+                <a:srgbClr val="000000"/>
+              </a:solidFill>
+              <a:latin typeface="Arial"/>
+            </a:endParaRPr>
+          </a:p>
+          <a:p>
+            <a:pPr lvl="6" marL="3024000" indent="-216000">
+              <a:spcBef>
+                <a:spcPts val="283"/>
+              </a:spcBef>
+              <a:buClr>
+                <a:srgbClr val="000000"/>
+              </a:buClr>
+              <a:buSzPct val="45000"/>
+              <a:buFont typeface="Wingdings" charset="2"/>
+              <a:buChar char=""/>
+            </a:pPr>
+            <a:r>
+              <a:rPr b="0" lang="en-US" sz="2000" spc="-1" strike="noStrike">
+                <a:solidFill>
+                  <a:srgbClr val="000000"/>
+                </a:solidFill>
+                <a:latin typeface="Arial"/>
+              </a:rPr>
+              <a:t>Seventh Outline Level</a:t>
+            </a:r>
+            <a:endParaRPr b="0" lang="en-US" sz="2000" spc="-1" strike="noStrike">
+              <a:solidFill>
+                <a:srgbClr val="000000"/>
+              </a:solidFill>
+              <a:latin typeface="Arial"/>
+            </a:endParaRPr>
+          </a:p>
+        </p:txBody>
+      </p:sp>
+    </p:spTree>
+  </p:cSld>
+  <p:clrMap bg1="lt1" bg2="lt2" tx1="dk1" tx2="dk2" accent1="accent1" accent2="accent2" accent3="accent3" accent4="accent4" accent5="accent5" accent6="accent6" hlink="hlink" folHlink="folHlink"/>
+  <p:sldLayoutIdLst>
+    <p:sldLayoutId id="2147483651" r:id="rId2"/>
   </p:sldLayoutIdLst>
 </p:sldMaster>
 </file>
@@ -2157,14 +2729,14 @@
       </p:grpSpPr>
       <p:sp>
         <p:nvSpPr>
-          <p:cNvPr id="8" name="Shape 0"/>
+          <p:cNvPr id="12" name="Shape 0"/>
           <p:cNvSpPr/>
           <p:nvPr/>
         </p:nvSpPr>
         <p:spPr>
           <a:xfrm>
             <a:off x="0" y="0"/>
-            <a:ext cx="163800" cy="5142960"/>
+            <a:ext cx="163080" cy="5142240"/>
           </a:xfrm>
           <a:prstGeom prst="rect">
             <a:avLst/>
@@ -2172,7 +2744,7 @@
           <a:solidFill>
             <a:srgbClr val="4fc3f7"/>
           </a:solidFill>
-          <a:ln w="12700">
+          <a:ln w="12600">
             <a:solidFill>
               <a:srgbClr val="4fc3f7"/>
             </a:solidFill>
@@ -2200,20 +2772,21 @@
                 <a:srgbClr val="000000"/>
               </a:solidFill>
               <a:latin typeface="Arial"/>
-            </a:endParaRPr>
-          </a:p>
-        </p:txBody>
-      </p:sp>
-      <p:sp>
-        <p:nvSpPr>
-          <p:cNvPr id="9" name="Shape 1"/>
+              <a:ea typeface="DejaVu Sans"/>
+            </a:endParaRPr>
+          </a:p>
+        </p:txBody>
+      </p:sp>
+      <p:sp>
+        <p:nvSpPr>
+          <p:cNvPr id="13" name="Shape 1"/>
           <p:cNvSpPr/>
           <p:nvPr/>
         </p:nvSpPr>
         <p:spPr>
           <a:xfrm>
             <a:off x="5943600" y="-1097280"/>
-            <a:ext cx="5028480" cy="5028480"/>
+            <a:ext cx="5027760" cy="5027760"/>
           </a:xfrm>
           <a:prstGeom prst="ellipse">
             <a:avLst/>
@@ -2223,7 +2796,7 @@
               <a:alpha val="8000"/>
             </a:srgbClr>
           </a:solidFill>
-          <a:ln w="12700">
+          <a:ln w="12600">
             <a:solidFill>
               <a:srgbClr val="ffffff">
                 <a:alpha val="8000"/>
@@ -2253,20 +2826,21 @@
                 <a:srgbClr val="000000"/>
               </a:solidFill>
               <a:latin typeface="Arial"/>
-            </a:endParaRPr>
-          </a:p>
-        </p:txBody>
-      </p:sp>
-      <p:sp>
-        <p:nvSpPr>
-          <p:cNvPr id="10" name="Shape 2"/>
+              <a:ea typeface="DejaVu Sans"/>
+            </a:endParaRPr>
+          </a:p>
+        </p:txBody>
+      </p:sp>
+      <p:sp>
+        <p:nvSpPr>
+          <p:cNvPr id="14" name="Shape 2"/>
           <p:cNvSpPr/>
           <p:nvPr/>
         </p:nvSpPr>
         <p:spPr>
           <a:xfrm>
             <a:off x="6583680" y="-457200"/>
-            <a:ext cx="3839760" cy="3839760"/>
+            <a:ext cx="3839040" cy="3839040"/>
           </a:xfrm>
           <a:prstGeom prst="ellipse">
             <a:avLst/>
@@ -2276,7 +2850,7 @@
               <a:alpha val="12000"/>
             </a:srgbClr>
           </a:solidFill>
-          <a:ln w="12700">
+          <a:ln w="12600">
             <a:solidFill>
               <a:srgbClr val="ffffff">
                 <a:alpha val="12000"/>
@@ -2306,20 +2880,21 @@
                 <a:srgbClr val="000000"/>
               </a:solidFill>
               <a:latin typeface="Arial"/>
-            </a:endParaRPr>
-          </a:p>
-        </p:txBody>
-      </p:sp>
-      <p:sp>
-        <p:nvSpPr>
-          <p:cNvPr id="11" name="Shape 3"/>
+              <a:ea typeface="DejaVu Sans"/>
+            </a:endParaRPr>
+          </a:p>
+        </p:txBody>
+      </p:sp>
+      <p:sp>
+        <p:nvSpPr>
+          <p:cNvPr id="15" name="Shape 3"/>
           <p:cNvSpPr/>
           <p:nvPr/>
         </p:nvSpPr>
         <p:spPr>
           <a:xfrm>
             <a:off x="502920" y="914400"/>
-            <a:ext cx="2010960" cy="291960"/>
+            <a:ext cx="2010240" cy="291240"/>
           </a:xfrm>
           <a:prstGeom prst="rect">
             <a:avLst/>
@@ -2327,7 +2902,7 @@
           <a:solidFill>
             <a:srgbClr val="4fc3f7"/>
           </a:solidFill>
-          <a:ln w="12700">
+          <a:ln w="12600">
             <a:solidFill>
               <a:srgbClr val="4fc3f7"/>
             </a:solidFill>
@@ -2355,20 +2930,21 @@
                 <a:srgbClr val="000000"/>
               </a:solidFill>
               <a:latin typeface="Arial"/>
-            </a:endParaRPr>
-          </a:p>
-        </p:txBody>
-      </p:sp>
-      <p:sp>
-        <p:nvSpPr>
-          <p:cNvPr id="12" name="Text 4"/>
+              <a:ea typeface="DejaVu Sans"/>
+            </a:endParaRPr>
+          </a:p>
+        </p:txBody>
+      </p:sp>
+      <p:sp>
+        <p:nvSpPr>
+          <p:cNvPr id="16" name="Text 4"/>
           <p:cNvSpPr/>
           <p:nvPr/>
         </p:nvSpPr>
         <p:spPr>
           <a:xfrm>
             <a:off x="502920" y="914400"/>
-            <a:ext cx="2010960" cy="291960"/>
+            <a:ext cx="2010240" cy="291240"/>
           </a:xfrm>
           <a:prstGeom prst="rect">
             <a:avLst/>
@@ -2403,6 +2979,7 @@
                   <a:srgbClr val="1e2761"/>
                 </a:solidFill>
                 <a:latin typeface="Calibri"/>
+                <a:ea typeface="DejaVu Sans"/>
               </a:rPr>
               <a:t>PROJET TUTOREE</a:t>
             </a:r>
@@ -2417,14 +2994,14 @@
       </p:sp>
       <p:sp>
         <p:nvSpPr>
-          <p:cNvPr id="13" name="Text 5"/>
+          <p:cNvPr id="17" name="Text 5"/>
           <p:cNvSpPr/>
           <p:nvPr/>
         </p:nvSpPr>
         <p:spPr>
           <a:xfrm>
             <a:off x="457200" y="1417320"/>
-            <a:ext cx="7771680" cy="1645200"/>
+            <a:ext cx="7770960" cy="1644480"/>
           </a:xfrm>
           <a:prstGeom prst="rect">
             <a:avLst/>
@@ -2500,14 +3077,14 @@
       </p:sp>
       <p:sp>
         <p:nvSpPr>
-          <p:cNvPr id="14" name="Text 6"/>
+          <p:cNvPr id="18" name="Text 6"/>
           <p:cNvSpPr/>
           <p:nvPr/>
         </p:nvSpPr>
         <p:spPr>
           <a:xfrm>
             <a:off x="502920" y="3154680"/>
-            <a:ext cx="6857280" cy="730800"/>
+            <a:ext cx="6856560" cy="730080"/>
           </a:xfrm>
           <a:prstGeom prst="rect">
             <a:avLst/>
@@ -2583,14 +3160,14 @@
       </p:sp>
       <p:sp>
         <p:nvSpPr>
-          <p:cNvPr id="15" name="Shape 7"/>
+          <p:cNvPr id="19" name="Shape 7"/>
           <p:cNvSpPr/>
           <p:nvPr/>
         </p:nvSpPr>
         <p:spPr>
           <a:xfrm>
             <a:off x="0" y="4526280"/>
-            <a:ext cx="9143280" cy="616680"/>
+            <a:ext cx="9142560" cy="615960"/>
           </a:xfrm>
           <a:prstGeom prst="rect">
             <a:avLst/>
@@ -2598,7 +3175,7 @@
           <a:solidFill>
             <a:srgbClr val="0d1b4b"/>
           </a:solidFill>
-          <a:ln w="12700">
+          <a:ln w="12600">
             <a:solidFill>
               <a:srgbClr val="0d1b4b"/>
             </a:solidFill>
@@ -2626,20 +3203,21 @@
                 <a:srgbClr val="ffffff"/>
               </a:solidFill>
               <a:latin typeface="Arial"/>
-            </a:endParaRPr>
-          </a:p>
-        </p:txBody>
-      </p:sp>
-      <p:sp>
-        <p:nvSpPr>
-          <p:cNvPr id="16" name="Text 8"/>
+              <a:ea typeface="DejaVu Sans"/>
+            </a:endParaRPr>
+          </a:p>
+        </p:txBody>
+      </p:sp>
+      <p:sp>
+        <p:nvSpPr>
+          <p:cNvPr id="20" name="Text 8"/>
           <p:cNvSpPr/>
           <p:nvPr/>
         </p:nvSpPr>
         <p:spPr>
           <a:xfrm>
             <a:off x="457200" y="4526280"/>
-            <a:ext cx="8228880" cy="616680"/>
+            <a:ext cx="8228160" cy="615960"/>
           </a:xfrm>
           <a:prstGeom prst="rect">
             <a:avLst/>
@@ -2674,6 +3252,7 @@
                   <a:srgbClr val="4fc3f7"/>
                 </a:solidFill>
                 <a:latin typeface="Calibri"/>
+                <a:ea typeface="DejaVu Sans"/>
               </a:rPr>
               <a:t> </a:t>
             </a:r>
@@ -2683,6 +3262,7 @@
                   <a:srgbClr val="cadcfc"/>
                 </a:solidFill>
                 <a:latin typeface="Calibri"/>
+                <a:ea typeface="DejaVu Sans"/>
               </a:rPr>
               <a:t>Mai 2026</a:t>
             </a:r>
@@ -2697,14 +3277,14 @@
       </p:sp>
       <p:sp>
         <p:nvSpPr>
-          <p:cNvPr id="17" name=""/>
+          <p:cNvPr id="21" name=""/>
           <p:cNvSpPr/>
           <p:nvPr/>
         </p:nvSpPr>
         <p:spPr>
           <a:xfrm>
             <a:off x="6172200" y="2514600"/>
-            <a:ext cx="2514240" cy="228240"/>
+            <a:ext cx="2513520" cy="227520"/>
           </a:xfrm>
           <a:prstGeom prst="rect">
             <a:avLst/>
@@ -2740,6 +3320,7 @@
                   <a:srgbClr val="ffffff"/>
                 </a:solidFill>
                 <a:latin typeface="Arial"/>
+                <a:ea typeface="DejaVu Sans"/>
               </a:rPr>
               <a:t>LibManager</a:t>
             </a:r>
@@ -2754,7 +3335,7 @@
       </p:sp>
       <p:pic>
         <p:nvPicPr>
-          <p:cNvPr id="18" name="" descr=""/>
+          <p:cNvPr id="22" name="" descr=""/>
           <p:cNvPicPr/>
           <p:nvPr/>
         </p:nvPicPr>
@@ -2765,7 +3346,7 @@
         <p:spPr>
           <a:xfrm>
             <a:off x="6858000" y="1295640"/>
-            <a:ext cx="990000" cy="990000"/>
+            <a:ext cx="989280" cy="989280"/>
           </a:xfrm>
           <a:prstGeom prst="rect">
             <a:avLst/>
@@ -2814,14 +3395,14 @@
       </p:grpSpPr>
       <p:sp>
         <p:nvSpPr>
-          <p:cNvPr id="19" name="Shape 0"/>
+          <p:cNvPr id="23" name="Shape 0"/>
           <p:cNvSpPr/>
           <p:nvPr/>
         </p:nvSpPr>
         <p:spPr>
           <a:xfrm>
             <a:off x="0" y="0"/>
-            <a:ext cx="9143280" cy="776520"/>
+            <a:ext cx="9142560" cy="775800"/>
           </a:xfrm>
           <a:prstGeom prst="rect">
             <a:avLst/>
@@ -2829,7 +3410,7 @@
           <a:solidFill>
             <a:srgbClr val="1e2761"/>
           </a:solidFill>
-          <a:ln w="12700">
+          <a:ln w="12600">
             <a:solidFill>
               <a:srgbClr val="1e2761"/>
             </a:solidFill>
@@ -2857,20 +3438,21 @@
                 <a:srgbClr val="ffffff"/>
               </a:solidFill>
               <a:latin typeface="Arial"/>
-            </a:endParaRPr>
-          </a:p>
-        </p:txBody>
-      </p:sp>
-      <p:sp>
-        <p:nvSpPr>
-          <p:cNvPr id="20" name="Text 1"/>
+              <a:ea typeface="DejaVu Sans"/>
+            </a:endParaRPr>
+          </a:p>
+        </p:txBody>
+      </p:sp>
+      <p:sp>
+        <p:nvSpPr>
+          <p:cNvPr id="24" name="Text 1"/>
           <p:cNvSpPr/>
           <p:nvPr/>
         </p:nvSpPr>
         <p:spPr>
           <a:xfrm>
             <a:off x="365760" y="0"/>
-            <a:ext cx="8228880" cy="776520"/>
+            <a:ext cx="8228160" cy="775800"/>
           </a:xfrm>
           <a:prstGeom prst="rect">
             <a:avLst/>
@@ -2905,6 +3487,7 @@
                   <a:srgbClr val="ffffff"/>
                 </a:solidFill>
                 <a:latin typeface="Calibri"/>
+                <a:ea typeface="DejaVu Sans"/>
               </a:rPr>
               <a:t>SOMMAIRE</a:t>
             </a:r>
@@ -2919,14 +3502,14 @@
       </p:sp>
       <p:sp>
         <p:nvSpPr>
-          <p:cNvPr id="21" name="Shape 2"/>
+          <p:cNvPr id="25" name="Shape 2"/>
           <p:cNvSpPr/>
           <p:nvPr/>
         </p:nvSpPr>
         <p:spPr>
           <a:xfrm>
             <a:off x="365760" y="1005840"/>
-            <a:ext cx="4114080" cy="913680"/>
+            <a:ext cx="4113360" cy="912960"/>
           </a:xfrm>
           <a:prstGeom prst="rect">
             <a:avLst/>
@@ -2934,14 +3517,14 @@
           <a:solidFill>
             <a:srgbClr val="ffffff"/>
           </a:solidFill>
-          <a:ln w="12700">
+          <a:ln w="12600">
             <a:solidFill>
               <a:srgbClr val="e2e8f0"/>
             </a:solidFill>
             <a:round/>
           </a:ln>
           <a:effectLst>
-            <a:outerShdw algn="bl" blurRad="50760" dir="8100000" dist="25455" kx="0" ky="0" rotWithShape="0" sx="100000" sy="100000">
+            <a:outerShdw blurRad="50760" dir="8100000" dist="25455" rotWithShape="0">
               <a:srgbClr val="000000">
                 <a:alpha val="7000"/>
               </a:srgbClr>
@@ -2969,20 +3552,21 @@
                 <a:srgbClr val="000000"/>
               </a:solidFill>
               <a:latin typeface="Arial"/>
-            </a:endParaRPr>
-          </a:p>
-        </p:txBody>
-      </p:sp>
-      <p:sp>
-        <p:nvSpPr>
-          <p:cNvPr id="22" name="Shape 3"/>
+              <a:ea typeface="DejaVu Sans"/>
+            </a:endParaRPr>
+          </a:p>
+        </p:txBody>
+      </p:sp>
+      <p:sp>
+        <p:nvSpPr>
+          <p:cNvPr id="26" name="Shape 3"/>
           <p:cNvSpPr/>
           <p:nvPr/>
         </p:nvSpPr>
         <p:spPr>
           <a:xfrm>
             <a:off x="365760" y="1005840"/>
-            <a:ext cx="63360" cy="913680"/>
+            <a:ext cx="62640" cy="912960"/>
           </a:xfrm>
           <a:prstGeom prst="rect">
             <a:avLst/>
@@ -2990,7 +3574,7 @@
           <a:solidFill>
             <a:srgbClr val="4fc3f7"/>
           </a:solidFill>
-          <a:ln w="12700">
+          <a:ln w="12600">
             <a:solidFill>
               <a:srgbClr val="4fc3f7"/>
             </a:solidFill>
@@ -3018,20 +3602,21 @@
                 <a:srgbClr val="000000"/>
               </a:solidFill>
               <a:latin typeface="Arial"/>
-            </a:endParaRPr>
-          </a:p>
-        </p:txBody>
-      </p:sp>
-      <p:sp>
-        <p:nvSpPr>
-          <p:cNvPr id="23" name="Text 4"/>
+              <a:ea typeface="DejaVu Sans"/>
+            </a:endParaRPr>
+          </a:p>
+        </p:txBody>
+      </p:sp>
+      <p:sp>
+        <p:nvSpPr>
+          <p:cNvPr id="27" name="Text 4"/>
           <p:cNvSpPr/>
           <p:nvPr/>
         </p:nvSpPr>
         <p:spPr>
           <a:xfrm>
             <a:off x="475560" y="1005840"/>
-            <a:ext cx="639360" cy="913680"/>
+            <a:ext cx="638640" cy="912960"/>
           </a:xfrm>
           <a:prstGeom prst="rect">
             <a:avLst/>
@@ -3066,6 +3651,7 @@
                   <a:srgbClr val="4fc3f7"/>
                 </a:solidFill>
                 <a:latin typeface="Calibri"/>
+                <a:ea typeface="DejaVu Sans"/>
               </a:rPr>
               <a:t>01</a:t>
             </a:r>
@@ -3080,14 +3666,14 @@
       </p:sp>
       <p:sp>
         <p:nvSpPr>
-          <p:cNvPr id="24" name="Text 5"/>
+          <p:cNvPr id="28" name="Text 5"/>
           <p:cNvSpPr/>
           <p:nvPr/>
         </p:nvSpPr>
         <p:spPr>
           <a:xfrm>
             <a:off x="1143000" y="1005840"/>
-            <a:ext cx="3199680" cy="913680"/>
+            <a:ext cx="3198960" cy="912960"/>
           </a:xfrm>
           <a:prstGeom prst="rect">
             <a:avLst/>
@@ -3122,6 +3708,7 @@
                   <a:srgbClr val="1e2761"/>
                 </a:solidFill>
                 <a:latin typeface="Calibri"/>
+                <a:ea typeface="DejaVu Sans"/>
               </a:rPr>
               <a:t>Contexte &amp; Problématique</a:t>
             </a:r>
@@ -3136,14 +3723,14 @@
       </p:sp>
       <p:sp>
         <p:nvSpPr>
-          <p:cNvPr id="25" name="Shape 6"/>
+          <p:cNvPr id="29" name="Shape 6"/>
           <p:cNvSpPr/>
           <p:nvPr/>
         </p:nvSpPr>
         <p:spPr>
           <a:xfrm>
             <a:off x="365760" y="2194560"/>
-            <a:ext cx="4114080" cy="913680"/>
+            <a:ext cx="4113360" cy="912960"/>
           </a:xfrm>
           <a:prstGeom prst="rect">
             <a:avLst/>
@@ -3151,14 +3738,14 @@
           <a:solidFill>
             <a:srgbClr val="ffffff"/>
           </a:solidFill>
-          <a:ln w="12700">
+          <a:ln w="12600">
             <a:solidFill>
               <a:srgbClr val="e2e8f0"/>
             </a:solidFill>
             <a:round/>
           </a:ln>
           <a:effectLst>
-            <a:outerShdw algn="bl" blurRad="50760" dir="8100000" dist="25455" kx="0" ky="0" rotWithShape="0" sx="100000" sy="100000">
+            <a:outerShdw blurRad="50760" dir="8100000" dist="25455" rotWithShape="0">
               <a:srgbClr val="000000">
                 <a:alpha val="7000"/>
               </a:srgbClr>
@@ -3186,20 +3773,21 @@
                 <a:srgbClr val="000000"/>
               </a:solidFill>
               <a:latin typeface="Arial"/>
-            </a:endParaRPr>
-          </a:p>
-        </p:txBody>
-      </p:sp>
-      <p:sp>
-        <p:nvSpPr>
-          <p:cNvPr id="26" name="Shape 7"/>
+              <a:ea typeface="DejaVu Sans"/>
+            </a:endParaRPr>
+          </a:p>
+        </p:txBody>
+      </p:sp>
+      <p:sp>
+        <p:nvSpPr>
+          <p:cNvPr id="30" name="Shape 7"/>
           <p:cNvSpPr/>
           <p:nvPr/>
         </p:nvSpPr>
         <p:spPr>
           <a:xfrm>
             <a:off x="365760" y="2194560"/>
-            <a:ext cx="63360" cy="913680"/>
+            <a:ext cx="62640" cy="912960"/>
           </a:xfrm>
           <a:prstGeom prst="rect">
             <a:avLst/>
@@ -3207,7 +3795,7 @@
           <a:solidFill>
             <a:srgbClr val="22c55e"/>
           </a:solidFill>
-          <a:ln w="12700">
+          <a:ln w="12600">
             <a:solidFill>
               <a:srgbClr val="22c55e"/>
             </a:solidFill>
@@ -3235,20 +3823,21 @@
                 <a:srgbClr val="ffffff"/>
               </a:solidFill>
               <a:latin typeface="Arial"/>
-            </a:endParaRPr>
-          </a:p>
-        </p:txBody>
-      </p:sp>
-      <p:sp>
-        <p:nvSpPr>
-          <p:cNvPr id="27" name="Text 8"/>
+              <a:ea typeface="DejaVu Sans"/>
+            </a:endParaRPr>
+          </a:p>
+        </p:txBody>
+      </p:sp>
+      <p:sp>
+        <p:nvSpPr>
+          <p:cNvPr id="31" name="Text 8"/>
           <p:cNvSpPr/>
           <p:nvPr/>
         </p:nvSpPr>
         <p:spPr>
           <a:xfrm>
             <a:off x="475560" y="2194560"/>
-            <a:ext cx="639360" cy="913680"/>
+            <a:ext cx="638640" cy="912960"/>
           </a:xfrm>
           <a:prstGeom prst="rect">
             <a:avLst/>
@@ -3283,6 +3872,7 @@
                   <a:srgbClr val="22c55e"/>
                 </a:solidFill>
                 <a:latin typeface="Calibri"/>
+                <a:ea typeface="DejaVu Sans"/>
               </a:rPr>
               <a:t>02</a:t>
             </a:r>
@@ -3297,14 +3887,14 @@
       </p:sp>
       <p:sp>
         <p:nvSpPr>
-          <p:cNvPr id="28" name="Text 9"/>
+          <p:cNvPr id="32" name="Text 9"/>
           <p:cNvSpPr/>
           <p:nvPr/>
         </p:nvSpPr>
         <p:spPr>
           <a:xfrm>
             <a:off x="1179000" y="2194560"/>
-            <a:ext cx="3199680" cy="913680"/>
+            <a:ext cx="3198960" cy="912960"/>
           </a:xfrm>
           <a:prstGeom prst="rect">
             <a:avLst/>
@@ -3339,6 +3929,7 @@
                   <a:srgbClr val="1e2761"/>
                 </a:solidFill>
                 <a:latin typeface="Calibri"/>
+                <a:ea typeface="DejaVu Sans"/>
               </a:rPr>
               <a:t>Objectifs du Projet</a:t>
             </a:r>
@@ -3353,14 +3944,14 @@
       </p:sp>
       <p:sp>
         <p:nvSpPr>
-          <p:cNvPr id="29" name="Shape 10"/>
+          <p:cNvPr id="33" name="Shape 10"/>
           <p:cNvSpPr/>
           <p:nvPr/>
         </p:nvSpPr>
         <p:spPr>
           <a:xfrm>
             <a:off x="365760" y="3383280"/>
-            <a:ext cx="4114080" cy="913680"/>
+            <a:ext cx="4113360" cy="912960"/>
           </a:xfrm>
           <a:prstGeom prst="rect">
             <a:avLst/>
@@ -3368,14 +3959,14 @@
           <a:solidFill>
             <a:srgbClr val="ffffff"/>
           </a:solidFill>
-          <a:ln w="12700">
+          <a:ln w="12600">
             <a:solidFill>
               <a:srgbClr val="e2e8f0"/>
             </a:solidFill>
             <a:round/>
           </a:ln>
           <a:effectLst>
-            <a:outerShdw algn="bl" blurRad="50760" dir="8100000" dist="25455" kx="0" ky="0" rotWithShape="0" sx="100000" sy="100000">
+            <a:outerShdw blurRad="50760" dir="8100000" dist="25455" rotWithShape="0">
               <a:srgbClr val="000000">
                 <a:alpha val="7000"/>
               </a:srgbClr>
@@ -3403,20 +3994,21 @@
                 <a:srgbClr val="000000"/>
               </a:solidFill>
               <a:latin typeface="Arial"/>
-            </a:endParaRPr>
-          </a:p>
-        </p:txBody>
-      </p:sp>
-      <p:sp>
-        <p:nvSpPr>
-          <p:cNvPr id="30" name="Shape 11"/>
+              <a:ea typeface="DejaVu Sans"/>
+            </a:endParaRPr>
+          </a:p>
+        </p:txBody>
+      </p:sp>
+      <p:sp>
+        <p:nvSpPr>
+          <p:cNvPr id="34" name="Shape 11"/>
           <p:cNvSpPr/>
           <p:nvPr/>
         </p:nvSpPr>
         <p:spPr>
           <a:xfrm>
             <a:off x="365760" y="3383280"/>
-            <a:ext cx="63360" cy="913680"/>
+            <a:ext cx="62640" cy="912960"/>
           </a:xfrm>
           <a:prstGeom prst="rect">
             <a:avLst/>
@@ -3424,7 +4016,7 @@
           <a:solidFill>
             <a:srgbClr val="f59e0b"/>
           </a:solidFill>
-          <a:ln w="12700">
+          <a:ln w="12600">
             <a:solidFill>
               <a:srgbClr val="f59e0b"/>
             </a:solidFill>
@@ -3452,20 +4044,21 @@
                 <a:srgbClr val="000000"/>
               </a:solidFill>
               <a:latin typeface="Arial"/>
-            </a:endParaRPr>
-          </a:p>
-        </p:txBody>
-      </p:sp>
-      <p:sp>
-        <p:nvSpPr>
-          <p:cNvPr id="31" name="Text 12"/>
+              <a:ea typeface="DejaVu Sans"/>
+            </a:endParaRPr>
+          </a:p>
+        </p:txBody>
+      </p:sp>
+      <p:sp>
+        <p:nvSpPr>
+          <p:cNvPr id="35" name="Text 12"/>
           <p:cNvSpPr/>
           <p:nvPr/>
         </p:nvSpPr>
         <p:spPr>
           <a:xfrm>
             <a:off x="475560" y="3383280"/>
-            <a:ext cx="639360" cy="913680"/>
+            <a:ext cx="638640" cy="912960"/>
           </a:xfrm>
           <a:prstGeom prst="rect">
             <a:avLst/>
@@ -3500,6 +4093,7 @@
                   <a:srgbClr val="f59e0b"/>
                 </a:solidFill>
                 <a:latin typeface="Calibri"/>
+                <a:ea typeface="DejaVu Sans"/>
               </a:rPr>
               <a:t>03</a:t>
             </a:r>
@@ -3514,14 +4108,14 @@
       </p:sp>
       <p:sp>
         <p:nvSpPr>
-          <p:cNvPr id="32" name="Text 13"/>
+          <p:cNvPr id="36" name="Text 13"/>
           <p:cNvSpPr/>
           <p:nvPr/>
         </p:nvSpPr>
         <p:spPr>
           <a:xfrm>
             <a:off x="1143000" y="3383280"/>
-            <a:ext cx="3199680" cy="913680"/>
+            <a:ext cx="3198960" cy="912960"/>
           </a:xfrm>
           <a:prstGeom prst="rect">
             <a:avLst/>
@@ -3556,6 +4150,7 @@
                   <a:srgbClr val="1e2761"/>
                 </a:solidFill>
                 <a:latin typeface="Calibri"/>
+                <a:ea typeface="DejaVu Sans"/>
               </a:rPr>
               <a:t>Architecture Technique</a:t>
             </a:r>
@@ -3570,14 +4165,14 @@
       </p:sp>
       <p:sp>
         <p:nvSpPr>
-          <p:cNvPr id="33" name="Shape 14"/>
+          <p:cNvPr id="37" name="Shape 14"/>
           <p:cNvSpPr/>
           <p:nvPr/>
         </p:nvSpPr>
         <p:spPr>
           <a:xfrm>
             <a:off x="4846320" y="1005840"/>
-            <a:ext cx="4114080" cy="913680"/>
+            <a:ext cx="4113360" cy="912960"/>
           </a:xfrm>
           <a:prstGeom prst="rect">
             <a:avLst/>
@@ -3585,14 +4180,14 @@
           <a:solidFill>
             <a:srgbClr val="ffffff"/>
           </a:solidFill>
-          <a:ln w="12700">
+          <a:ln w="12600">
             <a:solidFill>
               <a:srgbClr val="e2e8f0"/>
             </a:solidFill>
             <a:round/>
           </a:ln>
           <a:effectLst>
-            <a:outerShdw algn="bl" blurRad="50760" dir="8100000" dist="25455" kx="0" ky="0" rotWithShape="0" sx="100000" sy="100000">
+            <a:outerShdw blurRad="50760" dir="8100000" dist="25455" rotWithShape="0">
               <a:srgbClr val="000000">
                 <a:alpha val="7000"/>
               </a:srgbClr>
@@ -3620,20 +4215,21 @@
                 <a:srgbClr val="000000"/>
               </a:solidFill>
               <a:latin typeface="Arial"/>
-            </a:endParaRPr>
-          </a:p>
-        </p:txBody>
-      </p:sp>
-      <p:sp>
-        <p:nvSpPr>
-          <p:cNvPr id="34" name="Shape 15"/>
+              <a:ea typeface="DejaVu Sans"/>
+            </a:endParaRPr>
+          </a:p>
+        </p:txBody>
+      </p:sp>
+      <p:sp>
+        <p:nvSpPr>
+          <p:cNvPr id="38" name="Shape 15"/>
           <p:cNvSpPr/>
           <p:nvPr/>
         </p:nvSpPr>
         <p:spPr>
           <a:xfrm>
             <a:off x="4846320" y="1005840"/>
-            <a:ext cx="63360" cy="913680"/>
+            <a:ext cx="62640" cy="912960"/>
           </a:xfrm>
           <a:prstGeom prst="rect">
             <a:avLst/>
@@ -3641,7 +4237,7 @@
           <a:solidFill>
             <a:srgbClr val="ef4444"/>
           </a:solidFill>
-          <a:ln w="12700">
+          <a:ln w="12600">
             <a:solidFill>
               <a:srgbClr val="ef4444"/>
             </a:solidFill>
@@ -3669,20 +4265,21 @@
                 <a:srgbClr val="ffffff"/>
               </a:solidFill>
               <a:latin typeface="Arial"/>
-            </a:endParaRPr>
-          </a:p>
-        </p:txBody>
-      </p:sp>
-      <p:sp>
-        <p:nvSpPr>
-          <p:cNvPr id="35" name="Text 16"/>
+              <a:ea typeface="DejaVu Sans"/>
+            </a:endParaRPr>
+          </a:p>
+        </p:txBody>
+      </p:sp>
+      <p:sp>
+        <p:nvSpPr>
+          <p:cNvPr id="39" name="Text 16"/>
           <p:cNvSpPr/>
           <p:nvPr/>
         </p:nvSpPr>
         <p:spPr>
           <a:xfrm>
             <a:off x="4956120" y="1005840"/>
-            <a:ext cx="639360" cy="913680"/>
+            <a:ext cx="638640" cy="912960"/>
           </a:xfrm>
           <a:prstGeom prst="rect">
             <a:avLst/>
@@ -3717,6 +4314,7 @@
                   <a:srgbClr val="ef4444"/>
                 </a:solidFill>
                 <a:latin typeface="Calibri"/>
+                <a:ea typeface="DejaVu Sans"/>
               </a:rPr>
               <a:t>04</a:t>
             </a:r>
@@ -3731,14 +4329,14 @@
       </p:sp>
       <p:sp>
         <p:nvSpPr>
-          <p:cNvPr id="36" name="Text 17"/>
+          <p:cNvPr id="40" name="Text 17"/>
           <p:cNvSpPr/>
           <p:nvPr/>
         </p:nvSpPr>
         <p:spPr>
           <a:xfrm>
             <a:off x="5623560" y="1005840"/>
-            <a:ext cx="3199680" cy="913680"/>
+            <a:ext cx="3198960" cy="912960"/>
           </a:xfrm>
           <a:prstGeom prst="rect">
             <a:avLst/>
@@ -3773,8 +4371,9 @@
                   <a:srgbClr val="1e2761"/>
                 </a:solidFill>
                 <a:latin typeface="Calibri"/>
-              </a:rPr>
-              <a:t>Demonstration</a:t>
+                <a:ea typeface="DejaVu Sans"/>
+              </a:rPr>
+              <a:t>Démonstrations</a:t>
             </a:r>
             <a:endParaRPr b="0" lang="en-US" sz="1300" spc="-1" strike="noStrike">
               <a:solidFill>
@@ -3787,14 +4386,14 @@
       </p:sp>
       <p:sp>
         <p:nvSpPr>
-          <p:cNvPr id="37" name="Shape 19"/>
+          <p:cNvPr id="41" name="Shape 19"/>
           <p:cNvSpPr/>
           <p:nvPr/>
         </p:nvSpPr>
         <p:spPr>
           <a:xfrm>
             <a:off x="4846320" y="2194560"/>
-            <a:ext cx="63360" cy="913680"/>
+            <a:ext cx="62640" cy="912960"/>
           </a:xfrm>
           <a:prstGeom prst="rect">
             <a:avLst/>
@@ -3802,7 +4401,7 @@
           <a:solidFill>
             <a:srgbClr val="9333ea"/>
           </a:solidFill>
-          <a:ln w="12700">
+          <a:ln w="12600">
             <a:solidFill>
               <a:srgbClr val="9333ea"/>
             </a:solidFill>
@@ -3830,20 +4429,21 @@
                 <a:srgbClr val="ffffff"/>
               </a:solidFill>
               <a:latin typeface="Arial"/>
-            </a:endParaRPr>
-          </a:p>
-        </p:txBody>
-      </p:sp>
-      <p:sp>
-        <p:nvSpPr>
-          <p:cNvPr id="38" name="Text 20"/>
+              <a:ea typeface="DejaVu Sans"/>
+            </a:endParaRPr>
+          </a:p>
+        </p:txBody>
+      </p:sp>
+      <p:sp>
+        <p:nvSpPr>
+          <p:cNvPr id="42" name="Text 20"/>
           <p:cNvSpPr/>
           <p:nvPr/>
         </p:nvSpPr>
         <p:spPr>
           <a:xfrm>
             <a:off x="4956120" y="2194560"/>
-            <a:ext cx="639360" cy="913680"/>
+            <a:ext cx="638640" cy="912960"/>
           </a:xfrm>
           <a:prstGeom prst="rect">
             <a:avLst/>
@@ -3878,6 +4478,7 @@
                   <a:srgbClr val="9333ea"/>
                 </a:solidFill>
                 <a:latin typeface="Calibri"/>
+                <a:ea typeface="DejaVu Sans"/>
               </a:rPr>
               <a:t>05</a:t>
             </a:r>
@@ -3892,14 +4493,14 @@
       </p:sp>
       <p:sp>
         <p:nvSpPr>
-          <p:cNvPr id="39" name="Text 21"/>
+          <p:cNvPr id="43" name="Text 21"/>
           <p:cNvSpPr/>
           <p:nvPr/>
         </p:nvSpPr>
         <p:spPr>
           <a:xfrm>
             <a:off x="5623560" y="2194560"/>
-            <a:ext cx="3199680" cy="913680"/>
+            <a:ext cx="3198960" cy="912960"/>
           </a:xfrm>
           <a:prstGeom prst="rect">
             <a:avLst/>
@@ -3934,8 +4535,9 @@
                   <a:srgbClr val="1e2761"/>
                 </a:solidFill>
                 <a:latin typeface="Calibri"/>
-              </a:rPr>
-              <a:t>Avantages et inconvénients </a:t>
+                <a:ea typeface="DejaVu Sans"/>
+              </a:rPr>
+              <a:t>Point fort et point faible</a:t>
             </a:r>
             <a:endParaRPr b="0" lang="en-US" sz="1300" spc="-1" strike="noStrike">
               <a:solidFill>
@@ -3948,14 +4550,14 @@
       </p:sp>
       <p:sp>
         <p:nvSpPr>
-          <p:cNvPr id="40" name="Shape 22"/>
+          <p:cNvPr id="44" name="Shape 22"/>
           <p:cNvSpPr/>
           <p:nvPr/>
         </p:nvSpPr>
         <p:spPr>
           <a:xfrm>
             <a:off x="4846320" y="3383280"/>
-            <a:ext cx="4114080" cy="913680"/>
+            <a:ext cx="4113360" cy="912960"/>
           </a:xfrm>
           <a:prstGeom prst="rect">
             <a:avLst/>
@@ -3963,14 +4565,14 @@
           <a:solidFill>
             <a:srgbClr val="ffffff"/>
           </a:solidFill>
-          <a:ln w="12700">
+          <a:ln w="12600">
             <a:solidFill>
               <a:srgbClr val="e2e8f0"/>
             </a:solidFill>
             <a:round/>
           </a:ln>
           <a:effectLst>
-            <a:outerShdw algn="bl" blurRad="50760" dir="8100000" dist="25455" kx="0" ky="0" rotWithShape="0" sx="100000" sy="100000">
+            <a:outerShdw blurRad="50760" dir="8100000" dist="25455" rotWithShape="0">
               <a:srgbClr val="000000">
                 <a:alpha val="7000"/>
               </a:srgbClr>
@@ -3998,20 +4600,21 @@
                 <a:srgbClr val="000000"/>
               </a:solidFill>
               <a:latin typeface="Arial"/>
-            </a:endParaRPr>
-          </a:p>
-        </p:txBody>
-      </p:sp>
-      <p:sp>
-        <p:nvSpPr>
-          <p:cNvPr id="41" name="Shape 23"/>
+              <a:ea typeface="DejaVu Sans"/>
+            </a:endParaRPr>
+          </a:p>
+        </p:txBody>
+      </p:sp>
+      <p:sp>
+        <p:nvSpPr>
+          <p:cNvPr id="45" name="Shape 23"/>
           <p:cNvSpPr/>
           <p:nvPr/>
         </p:nvSpPr>
         <p:spPr>
           <a:xfrm>
             <a:off x="4846320" y="3383280"/>
-            <a:ext cx="63360" cy="913680"/>
+            <a:ext cx="62640" cy="912960"/>
           </a:xfrm>
           <a:prstGeom prst="rect">
             <a:avLst/>
@@ -4019,7 +4622,7 @@
           <a:solidFill>
             <a:srgbClr val="1e2761"/>
           </a:solidFill>
-          <a:ln w="12700">
+          <a:ln w="12600">
             <a:solidFill>
               <a:srgbClr val="1e2761"/>
             </a:solidFill>
@@ -4047,20 +4650,21 @@
                 <a:srgbClr val="ffffff"/>
               </a:solidFill>
               <a:latin typeface="Arial"/>
-            </a:endParaRPr>
-          </a:p>
-        </p:txBody>
-      </p:sp>
-      <p:sp>
-        <p:nvSpPr>
-          <p:cNvPr id="42" name="Text 24"/>
+              <a:ea typeface="DejaVu Sans"/>
+            </a:endParaRPr>
+          </a:p>
+        </p:txBody>
+      </p:sp>
+      <p:sp>
+        <p:nvSpPr>
+          <p:cNvPr id="46" name="Text 24"/>
           <p:cNvSpPr/>
           <p:nvPr/>
         </p:nvSpPr>
         <p:spPr>
           <a:xfrm>
             <a:off x="4956120" y="3383280"/>
-            <a:ext cx="639360" cy="913680"/>
+            <a:ext cx="638640" cy="912960"/>
           </a:xfrm>
           <a:prstGeom prst="rect">
             <a:avLst/>
@@ -4095,6 +4699,7 @@
                   <a:srgbClr val="1e2761"/>
                 </a:solidFill>
                 <a:latin typeface="Calibri"/>
+                <a:ea typeface="DejaVu Sans"/>
               </a:rPr>
               <a:t>06</a:t>
             </a:r>
@@ -4109,14 +4714,14 @@
       </p:sp>
       <p:sp>
         <p:nvSpPr>
-          <p:cNvPr id="43" name="Text 25"/>
+          <p:cNvPr id="47" name="Text 25"/>
           <p:cNvSpPr/>
           <p:nvPr/>
         </p:nvSpPr>
         <p:spPr>
           <a:xfrm>
             <a:off x="5623560" y="3383280"/>
-            <a:ext cx="3199680" cy="913680"/>
+            <a:ext cx="3198960" cy="912960"/>
           </a:xfrm>
           <a:prstGeom prst="rect">
             <a:avLst/>
@@ -4151,6 +4756,7 @@
                   <a:srgbClr val="1e2761"/>
                 </a:solidFill>
                 <a:latin typeface="Calibri"/>
+                <a:ea typeface="DejaVu Sans"/>
               </a:rPr>
               <a:t>Conclusion &amp; Prochaines Étapes</a:t>
             </a:r>
@@ -4202,14 +4808,14 @@
       </p:grpSpPr>
       <p:sp>
         <p:nvSpPr>
-          <p:cNvPr id="44" name="Shape 0"/>
+          <p:cNvPr id="48" name="Shape 0"/>
           <p:cNvSpPr/>
           <p:nvPr/>
         </p:nvSpPr>
         <p:spPr>
           <a:xfrm>
             <a:off x="0" y="0"/>
-            <a:ext cx="9143280" cy="776520"/>
+            <a:ext cx="9142560" cy="775800"/>
           </a:xfrm>
           <a:prstGeom prst="rect">
             <a:avLst/>
@@ -4217,7 +4823,7 @@
           <a:solidFill>
             <a:srgbClr val="1e2761"/>
           </a:solidFill>
-          <a:ln w="12700">
+          <a:ln w="12600">
             <a:solidFill>
               <a:srgbClr val="1e2761"/>
             </a:solidFill>
@@ -4245,20 +4851,21 @@
                 <a:srgbClr val="ffffff"/>
               </a:solidFill>
               <a:latin typeface="Arial"/>
-            </a:endParaRPr>
-          </a:p>
-        </p:txBody>
-      </p:sp>
-      <p:sp>
-        <p:nvSpPr>
-          <p:cNvPr id="45" name="Text 1"/>
+              <a:ea typeface="DejaVu Sans"/>
+            </a:endParaRPr>
+          </a:p>
+        </p:txBody>
+      </p:sp>
+      <p:sp>
+        <p:nvSpPr>
+          <p:cNvPr id="49" name="Text 1"/>
           <p:cNvSpPr/>
           <p:nvPr/>
         </p:nvSpPr>
         <p:spPr>
           <a:xfrm>
             <a:off x="365760" y="0"/>
-            <a:ext cx="8228880" cy="776520"/>
+            <a:ext cx="8228160" cy="775800"/>
           </a:xfrm>
           <a:prstGeom prst="rect">
             <a:avLst/>
@@ -4293,6 +4900,7 @@
                   <a:srgbClr val="ffffff"/>
                 </a:solidFill>
                 <a:latin typeface="Calibri"/>
+                <a:ea typeface="DejaVu Sans"/>
               </a:rPr>
               <a:t>01  |  Contexte &amp; Problématique</a:t>
             </a:r>
@@ -4307,14 +4915,14 @@
       </p:sp>
       <p:sp>
         <p:nvSpPr>
-          <p:cNvPr id="46" name="Text 3"/>
+          <p:cNvPr id="50" name="Text 3"/>
           <p:cNvSpPr/>
           <p:nvPr/>
         </p:nvSpPr>
         <p:spPr>
           <a:xfrm>
             <a:off x="274320" y="914400"/>
-            <a:ext cx="4114080" cy="410760"/>
+            <a:ext cx="4113360" cy="410040"/>
           </a:xfrm>
           <a:prstGeom prst="rect">
             <a:avLst/>
@@ -4349,6 +4957,7 @@
                   <a:srgbClr val="4fc3f7"/>
                 </a:solidFill>
                 <a:latin typeface="Calibri"/>
+                <a:ea typeface="DejaVu Sans"/>
               </a:rPr>
               <a:t>CONTEXTE</a:t>
             </a:r>
@@ -4363,14 +4972,14 @@
       </p:sp>
       <p:sp>
         <p:nvSpPr>
-          <p:cNvPr id="47" name="Text 4"/>
+          <p:cNvPr id="51" name="Text 4"/>
           <p:cNvSpPr/>
           <p:nvPr/>
         </p:nvSpPr>
         <p:spPr>
           <a:xfrm>
             <a:off x="483480" y="1417320"/>
-            <a:ext cx="3839760" cy="3016800"/>
+            <a:ext cx="3839040" cy="3016080"/>
           </a:xfrm>
           <a:prstGeom prst="rect">
             <a:avLst/>
@@ -4495,14 +5104,14 @@
       </p:sp>
       <p:sp>
         <p:nvSpPr>
-          <p:cNvPr id="48" name=""/>
+          <p:cNvPr id="52" name=""/>
           <p:cNvSpPr/>
           <p:nvPr/>
         </p:nvSpPr>
         <p:spPr>
           <a:xfrm>
             <a:off x="2286000" y="2286000"/>
-            <a:ext cx="4114440" cy="914040"/>
+            <a:ext cx="4113720" cy="913320"/>
           </a:xfrm>
           <a:prstGeom prst="rect">
             <a:avLst/>
@@ -4538,6 +5147,7 @@
                   <a:srgbClr val="ffffff"/>
                 </a:solidFill>
                 <a:latin typeface="Arial"/>
+                <a:ea typeface="DejaVu Sans"/>
               </a:rPr>
               <a:t>Quelle problème l’appication résout-elle ?</a:t>
             </a:r>
@@ -4552,14 +5162,14 @@
       </p:sp>
       <p:sp>
         <p:nvSpPr>
-          <p:cNvPr id="49" name=""/>
+          <p:cNvPr id="53" name=""/>
           <p:cNvSpPr/>
           <p:nvPr/>
         </p:nvSpPr>
         <p:spPr>
           <a:xfrm>
             <a:off x="2286000" y="3429000"/>
-            <a:ext cx="4114440" cy="914040"/>
+            <a:ext cx="4113720" cy="913320"/>
           </a:xfrm>
           <a:prstGeom prst="rect">
             <a:avLst/>
@@ -4595,6 +5205,7 @@
                   <a:srgbClr val="ffffff"/>
                 </a:solidFill>
                 <a:latin typeface="Arial"/>
+                <a:ea typeface="DejaVu Sans"/>
               </a:rPr>
               <a:t>Pourquoi ce projet ?</a:t>
             </a:r>
@@ -4646,14 +5257,14 @@
       </p:grpSpPr>
       <p:sp>
         <p:nvSpPr>
-          <p:cNvPr id="50" name="Shape 0"/>
+          <p:cNvPr id="54" name="Shape 0"/>
           <p:cNvSpPr/>
           <p:nvPr/>
         </p:nvSpPr>
         <p:spPr>
           <a:xfrm>
             <a:off x="0" y="0"/>
-            <a:ext cx="9143280" cy="776520"/>
+            <a:ext cx="9142560" cy="775800"/>
           </a:xfrm>
           <a:prstGeom prst="rect">
             <a:avLst/>
@@ -4661,7 +5272,7 @@
           <a:solidFill>
             <a:srgbClr val="1e2761"/>
           </a:solidFill>
-          <a:ln w="12700">
+          <a:ln w="12600">
             <a:solidFill>
               <a:srgbClr val="1e2761"/>
             </a:solidFill>
@@ -4689,20 +5300,21 @@
                 <a:srgbClr val="ffffff"/>
               </a:solidFill>
               <a:latin typeface="Arial"/>
-            </a:endParaRPr>
-          </a:p>
-        </p:txBody>
-      </p:sp>
-      <p:sp>
-        <p:nvSpPr>
-          <p:cNvPr id="51" name="Text 1"/>
+              <a:ea typeface="DejaVu Sans"/>
+            </a:endParaRPr>
+          </a:p>
+        </p:txBody>
+      </p:sp>
+      <p:sp>
+        <p:nvSpPr>
+          <p:cNvPr id="55" name="Text 1"/>
           <p:cNvSpPr/>
           <p:nvPr/>
         </p:nvSpPr>
         <p:spPr>
           <a:xfrm>
             <a:off x="365760" y="0"/>
-            <a:ext cx="8228880" cy="776520"/>
+            <a:ext cx="8228160" cy="775800"/>
           </a:xfrm>
           <a:prstGeom prst="rect">
             <a:avLst/>
@@ -4737,6 +5349,7 @@
                   <a:srgbClr val="ffffff"/>
                 </a:solidFill>
                 <a:latin typeface="Calibri"/>
+                <a:ea typeface="DejaVu Sans"/>
               </a:rPr>
               <a:t>02  |  Objectifs du Projet</a:t>
             </a:r>
@@ -4751,14 +5364,14 @@
       </p:sp>
       <p:sp>
         <p:nvSpPr>
-          <p:cNvPr id="52" name="Shape 2"/>
+          <p:cNvPr id="56" name="Shape 2"/>
           <p:cNvSpPr/>
           <p:nvPr/>
         </p:nvSpPr>
         <p:spPr>
           <a:xfrm>
             <a:off x="274320" y="960120"/>
-            <a:ext cx="4159800" cy="1736640"/>
+            <a:ext cx="4159080" cy="1735920"/>
           </a:xfrm>
           <a:prstGeom prst="rect">
             <a:avLst/>
@@ -4766,14 +5379,14 @@
           <a:solidFill>
             <a:srgbClr val="ffffff"/>
           </a:solidFill>
-          <a:ln w="12700">
+          <a:ln w="12600">
             <a:solidFill>
               <a:srgbClr val="e2e8f0"/>
             </a:solidFill>
             <a:round/>
           </a:ln>
           <a:effectLst>
-            <a:outerShdw algn="bl" blurRad="63360" dir="8100000" dist="25455" kx="0" ky="0" rotWithShape="0" sx="100000" sy="100000">
+            <a:outerShdw blurRad="63360" dir="8100000" dist="25455" rotWithShape="0">
               <a:srgbClr val="000000">
                 <a:alpha val="7000"/>
               </a:srgbClr>
@@ -4801,20 +5414,21 @@
                 <a:srgbClr val="000000"/>
               </a:solidFill>
               <a:latin typeface="Arial"/>
-            </a:endParaRPr>
-          </a:p>
-        </p:txBody>
-      </p:sp>
-      <p:sp>
-        <p:nvSpPr>
-          <p:cNvPr id="53" name="Shape 3"/>
+              <a:ea typeface="DejaVu Sans"/>
+            </a:endParaRPr>
+          </a:p>
+        </p:txBody>
+      </p:sp>
+      <p:sp>
+        <p:nvSpPr>
+          <p:cNvPr id="57" name="Shape 3"/>
           <p:cNvSpPr/>
           <p:nvPr/>
         </p:nvSpPr>
         <p:spPr>
           <a:xfrm>
             <a:off x="274320" y="960120"/>
-            <a:ext cx="4159800" cy="63360"/>
+            <a:ext cx="4159080" cy="62640"/>
           </a:xfrm>
           <a:prstGeom prst="rect">
             <a:avLst/>
@@ -4822,7 +5436,7 @@
           <a:solidFill>
             <a:srgbClr val="4fc3f7"/>
           </a:solidFill>
-          <a:ln w="12700">
+          <a:ln w="12600">
             <a:solidFill>
               <a:srgbClr val="4fc3f7"/>
             </a:solidFill>
@@ -4850,20 +5464,21 @@
                 <a:srgbClr val="000000"/>
               </a:solidFill>
               <a:latin typeface="Arial"/>
-            </a:endParaRPr>
-          </a:p>
-        </p:txBody>
-      </p:sp>
-      <p:sp>
-        <p:nvSpPr>
-          <p:cNvPr id="54" name="Shape 4"/>
+              <a:ea typeface="DejaVu Sans"/>
+            </a:endParaRPr>
+          </a:p>
+        </p:txBody>
+      </p:sp>
+      <p:sp>
+        <p:nvSpPr>
+          <p:cNvPr id="58" name="Shape 4"/>
           <p:cNvSpPr/>
           <p:nvPr/>
         </p:nvSpPr>
         <p:spPr>
           <a:xfrm>
             <a:off x="457200" y="1188720"/>
-            <a:ext cx="593640" cy="593640"/>
+            <a:ext cx="592920" cy="592920"/>
           </a:xfrm>
           <a:prstGeom prst="ellipse">
             <a:avLst/>
@@ -4873,7 +5488,7 @@
               <a:alpha val="15000"/>
             </a:srgbClr>
           </a:solidFill>
-          <a:ln w="12700">
+          <a:ln w="12600">
             <a:solidFill>
               <a:srgbClr val="4fc3f7">
                 <a:alpha val="15000"/>
@@ -4903,20 +5518,21 @@
                 <a:srgbClr val="000000"/>
               </a:solidFill>
               <a:latin typeface="Arial"/>
-            </a:endParaRPr>
-          </a:p>
-        </p:txBody>
-      </p:sp>
-      <p:sp>
-        <p:nvSpPr>
-          <p:cNvPr id="55" name="Text 5"/>
+              <a:ea typeface="DejaVu Sans"/>
+            </a:endParaRPr>
+          </a:p>
+        </p:txBody>
+      </p:sp>
+      <p:sp>
+        <p:nvSpPr>
+          <p:cNvPr id="59" name="Text 5"/>
           <p:cNvSpPr/>
           <p:nvPr/>
         </p:nvSpPr>
         <p:spPr>
           <a:xfrm>
             <a:off x="457200" y="1188720"/>
-            <a:ext cx="593640" cy="593640"/>
+            <a:ext cx="592920" cy="592920"/>
           </a:xfrm>
           <a:prstGeom prst="rect">
             <a:avLst/>
@@ -4951,6 +5567,7 @@
                   <a:srgbClr val="000000"/>
                 </a:solidFill>
                 <a:latin typeface="Calibri"/>
+                <a:ea typeface="DejaVu Sans"/>
               </a:rPr>
               <a:t>🗄</a:t>
             </a:r>
@@ -4965,14 +5582,14 @@
       </p:sp>
       <p:sp>
         <p:nvSpPr>
-          <p:cNvPr id="56" name="Text 6"/>
+          <p:cNvPr id="60" name="Text 6"/>
           <p:cNvSpPr/>
           <p:nvPr/>
         </p:nvSpPr>
         <p:spPr>
           <a:xfrm>
             <a:off x="1170360" y="1097280"/>
-            <a:ext cx="3108240" cy="273600"/>
+            <a:ext cx="3107520" cy="272880"/>
           </a:xfrm>
           <a:prstGeom prst="rect">
             <a:avLst/>
@@ -5007,6 +5624,7 @@
                   <a:srgbClr val="4fc3f7"/>
                 </a:solidFill>
                 <a:latin typeface="Calibri"/>
+                <a:ea typeface="DejaVu Sans"/>
               </a:rPr>
               <a:t>Objectif 1</a:t>
             </a:r>
@@ -5021,14 +5639,14 @@
       </p:sp>
       <p:sp>
         <p:nvSpPr>
-          <p:cNvPr id="57" name="Text 7"/>
+          <p:cNvPr id="61" name="Text 7"/>
           <p:cNvSpPr/>
           <p:nvPr/>
         </p:nvSpPr>
         <p:spPr>
           <a:xfrm>
             <a:off x="1170360" y="1371600"/>
-            <a:ext cx="3108240" cy="365040"/>
+            <a:ext cx="3107520" cy="364320"/>
           </a:xfrm>
           <a:prstGeom prst="rect">
             <a:avLst/>
@@ -5063,8 +5681,9 @@
                   <a:srgbClr val="1e2761"/>
                 </a:solidFill>
                 <a:latin typeface="Calibri"/>
-              </a:rPr>
-              <a:t>Moérnisation , numérisation et centralisation</a:t>
+                <a:ea typeface="DejaVu Sans"/>
+              </a:rPr>
+              <a:t>Modérnisation , numérisation et centralisation</a:t>
             </a:r>
             <a:endParaRPr b="0" lang="en-US" sz="1400" spc="-1" strike="noStrike">
               <a:solidFill>
@@ -5077,14 +5696,14 @@
       </p:sp>
       <p:sp>
         <p:nvSpPr>
-          <p:cNvPr id="58" name="Text 8"/>
+          <p:cNvPr id="62" name="Text 8"/>
           <p:cNvSpPr/>
           <p:nvPr/>
         </p:nvSpPr>
         <p:spPr>
           <a:xfrm>
             <a:off x="457200" y="1965960"/>
-            <a:ext cx="3748320" cy="639360"/>
+            <a:ext cx="3747600" cy="638640"/>
           </a:xfrm>
           <a:prstGeom prst="rect">
             <a:avLst/>
@@ -5119,6 +5738,7 @@
                   <a:srgbClr val="64748b"/>
                 </a:solidFill>
                 <a:latin typeface="Calibri"/>
+                <a:ea typeface="DejaVu Sans"/>
               </a:rPr>
               <a:t>Créer une base de données unique et fiable, accessible à tous les services en temps réel, modérniser et numériser les activités au sein de la bibliothèque.</a:t>
             </a:r>
@@ -5133,14 +5753,14 @@
       </p:sp>
       <p:sp>
         <p:nvSpPr>
-          <p:cNvPr id="59" name="Shape 9"/>
+          <p:cNvPr id="63" name="Shape 9"/>
           <p:cNvSpPr/>
           <p:nvPr/>
         </p:nvSpPr>
         <p:spPr>
           <a:xfrm>
             <a:off x="4754880" y="960120"/>
-            <a:ext cx="4159800" cy="1736640"/>
+            <a:ext cx="4159080" cy="1735920"/>
           </a:xfrm>
           <a:prstGeom prst="rect">
             <a:avLst/>
@@ -5148,14 +5768,14 @@
           <a:solidFill>
             <a:srgbClr val="ffffff"/>
           </a:solidFill>
-          <a:ln w="12700">
+          <a:ln w="12600">
             <a:solidFill>
               <a:srgbClr val="e2e8f0"/>
             </a:solidFill>
             <a:round/>
           </a:ln>
           <a:effectLst>
-            <a:outerShdw algn="bl" blurRad="63360" dir="8100000" dist="25455" kx="0" ky="0" rotWithShape="0" sx="100000" sy="100000">
+            <a:outerShdw blurRad="63360" dir="8100000" dist="25455" rotWithShape="0">
               <a:srgbClr val="000000">
                 <a:alpha val="7000"/>
               </a:srgbClr>
@@ -5183,20 +5803,21 @@
                 <a:srgbClr val="000000"/>
               </a:solidFill>
               <a:latin typeface="Arial"/>
-            </a:endParaRPr>
-          </a:p>
-        </p:txBody>
-      </p:sp>
-      <p:sp>
-        <p:nvSpPr>
-          <p:cNvPr id="60" name="Shape 10"/>
+              <a:ea typeface="DejaVu Sans"/>
+            </a:endParaRPr>
+          </a:p>
+        </p:txBody>
+      </p:sp>
+      <p:sp>
+        <p:nvSpPr>
+          <p:cNvPr id="64" name="Shape 10"/>
           <p:cNvSpPr/>
           <p:nvPr/>
         </p:nvSpPr>
         <p:spPr>
           <a:xfrm>
             <a:off x="4754880" y="960120"/>
-            <a:ext cx="4159800" cy="63360"/>
+            <a:ext cx="4159080" cy="62640"/>
           </a:xfrm>
           <a:prstGeom prst="rect">
             <a:avLst/>
@@ -5204,7 +5825,7 @@
           <a:solidFill>
             <a:srgbClr val="22c55e"/>
           </a:solidFill>
-          <a:ln w="12700">
+          <a:ln w="12600">
             <a:solidFill>
               <a:srgbClr val="22c55e"/>
             </a:solidFill>
@@ -5232,20 +5853,21 @@
                 <a:srgbClr val="ffffff"/>
               </a:solidFill>
               <a:latin typeface="Arial"/>
-            </a:endParaRPr>
-          </a:p>
-        </p:txBody>
-      </p:sp>
-      <p:sp>
-        <p:nvSpPr>
-          <p:cNvPr id="61" name="Shape 11"/>
+              <a:ea typeface="DejaVu Sans"/>
+            </a:endParaRPr>
+          </a:p>
+        </p:txBody>
+      </p:sp>
+      <p:sp>
+        <p:nvSpPr>
+          <p:cNvPr id="65" name="Shape 11"/>
           <p:cNvSpPr/>
           <p:nvPr/>
         </p:nvSpPr>
         <p:spPr>
           <a:xfrm>
             <a:off x="4937760" y="1188720"/>
-            <a:ext cx="593640" cy="593640"/>
+            <a:ext cx="592920" cy="592920"/>
           </a:xfrm>
           <a:prstGeom prst="ellipse">
             <a:avLst/>
@@ -5255,7 +5877,7 @@
               <a:alpha val="15000"/>
             </a:srgbClr>
           </a:solidFill>
-          <a:ln w="12700">
+          <a:ln w="12600">
             <a:solidFill>
               <a:srgbClr val="22c55e">
                 <a:alpha val="15000"/>
@@ -5285,20 +5907,21 @@
                 <a:srgbClr val="ffffff"/>
               </a:solidFill>
               <a:latin typeface="Arial"/>
-            </a:endParaRPr>
-          </a:p>
-        </p:txBody>
-      </p:sp>
-      <p:sp>
-        <p:nvSpPr>
-          <p:cNvPr id="62" name="Text 12"/>
+              <a:ea typeface="DejaVu Sans"/>
+            </a:endParaRPr>
+          </a:p>
+        </p:txBody>
+      </p:sp>
+      <p:sp>
+        <p:nvSpPr>
+          <p:cNvPr id="66" name="Text 12"/>
           <p:cNvSpPr/>
           <p:nvPr/>
         </p:nvSpPr>
         <p:spPr>
           <a:xfrm>
             <a:off x="4937760" y="1188720"/>
-            <a:ext cx="593640" cy="593640"/>
+            <a:ext cx="592920" cy="592920"/>
           </a:xfrm>
           <a:prstGeom prst="rect">
             <a:avLst/>
@@ -5333,6 +5956,7 @@
                   <a:srgbClr val="000000"/>
                 </a:solidFill>
                 <a:latin typeface="Calibri"/>
+                <a:ea typeface="DejaVu Sans"/>
               </a:rPr>
               <a:t>⚙</a:t>
             </a:r>
@@ -5347,14 +5971,14 @@
       </p:sp>
       <p:sp>
         <p:nvSpPr>
-          <p:cNvPr id="63" name="Text 13"/>
+          <p:cNvPr id="67" name="Text 13"/>
           <p:cNvSpPr/>
           <p:nvPr/>
         </p:nvSpPr>
         <p:spPr>
           <a:xfrm>
             <a:off x="5650920" y="1097280"/>
-            <a:ext cx="3108240" cy="273600"/>
+            <a:ext cx="3107520" cy="272880"/>
           </a:xfrm>
           <a:prstGeom prst="rect">
             <a:avLst/>
@@ -5389,6 +6013,7 @@
                   <a:srgbClr val="22c55e"/>
                 </a:solidFill>
                 <a:latin typeface="Calibri"/>
+                <a:ea typeface="DejaVu Sans"/>
               </a:rPr>
               <a:t>Objectif 2</a:t>
             </a:r>
@@ -5403,14 +6028,14 @@
       </p:sp>
       <p:sp>
         <p:nvSpPr>
-          <p:cNvPr id="64" name="Text 14"/>
+          <p:cNvPr id="68" name="Text 14"/>
           <p:cNvSpPr/>
           <p:nvPr/>
         </p:nvSpPr>
         <p:spPr>
           <a:xfrm>
             <a:off x="5650920" y="1371600"/>
-            <a:ext cx="3108240" cy="365040"/>
+            <a:ext cx="3107520" cy="364320"/>
           </a:xfrm>
           <a:prstGeom prst="rect">
             <a:avLst/>
@@ -5445,6 +6070,7 @@
                   <a:srgbClr val="1e2761"/>
                 </a:solidFill>
                 <a:latin typeface="Calibri"/>
+                <a:ea typeface="DejaVu Sans"/>
               </a:rPr>
               <a:t>Automatiser les processus / Faciliter le travail</a:t>
             </a:r>
@@ -5459,14 +6085,14 @@
       </p:sp>
       <p:sp>
         <p:nvSpPr>
-          <p:cNvPr id="65" name="Text 15"/>
+          <p:cNvPr id="69" name="Text 15"/>
           <p:cNvSpPr/>
           <p:nvPr/>
         </p:nvSpPr>
         <p:spPr>
           <a:xfrm>
             <a:off x="4937760" y="1965960"/>
-            <a:ext cx="3748320" cy="639360"/>
+            <a:ext cx="3747600" cy="638640"/>
           </a:xfrm>
           <a:prstGeom prst="rect">
             <a:avLst/>
@@ -5501,6 +6127,7 @@
                   <a:srgbClr val="64748b"/>
                 </a:solidFill>
                 <a:latin typeface="Calibri"/>
+                <a:ea typeface="DejaVu Sans"/>
               </a:rPr>
               <a:t>Réduire les tâches manuelles répétitives , envoie d’un email de rappel et notification automatisé.</a:t>
             </a:r>
@@ -5515,14 +6142,14 @@
       </p:sp>
       <p:sp>
         <p:nvSpPr>
-          <p:cNvPr id="66" name="Shape 16"/>
+          <p:cNvPr id="70" name="Shape 16"/>
           <p:cNvSpPr/>
           <p:nvPr/>
         </p:nvSpPr>
         <p:spPr>
           <a:xfrm>
             <a:off x="274320" y="2926080"/>
-            <a:ext cx="4159800" cy="1736640"/>
+            <a:ext cx="4159080" cy="1735920"/>
           </a:xfrm>
           <a:prstGeom prst="rect">
             <a:avLst/>
@@ -5530,14 +6157,14 @@
           <a:solidFill>
             <a:srgbClr val="ffffff"/>
           </a:solidFill>
-          <a:ln w="12700">
+          <a:ln w="12600">
             <a:solidFill>
               <a:srgbClr val="e2e8f0"/>
             </a:solidFill>
             <a:round/>
           </a:ln>
           <a:effectLst>
-            <a:outerShdw algn="bl" blurRad="63360" dir="8100000" dist="25455" kx="0" ky="0" rotWithShape="0" sx="100000" sy="100000">
+            <a:outerShdw blurRad="63360" dir="8100000" dist="25455" rotWithShape="0">
               <a:srgbClr val="000000">
                 <a:alpha val="7000"/>
               </a:srgbClr>
@@ -5565,20 +6192,21 @@
                 <a:srgbClr val="000000"/>
               </a:solidFill>
               <a:latin typeface="Arial"/>
-            </a:endParaRPr>
-          </a:p>
-        </p:txBody>
-      </p:sp>
-      <p:sp>
-        <p:nvSpPr>
-          <p:cNvPr id="67" name="Shape 17"/>
+              <a:ea typeface="DejaVu Sans"/>
+            </a:endParaRPr>
+          </a:p>
+        </p:txBody>
+      </p:sp>
+      <p:sp>
+        <p:nvSpPr>
+          <p:cNvPr id="71" name="Shape 17"/>
           <p:cNvSpPr/>
           <p:nvPr/>
         </p:nvSpPr>
         <p:spPr>
           <a:xfrm>
             <a:off x="274320" y="2926080"/>
-            <a:ext cx="4159800" cy="63360"/>
+            <a:ext cx="4159080" cy="62640"/>
           </a:xfrm>
           <a:prstGeom prst="rect">
             <a:avLst/>
@@ -5586,7 +6214,7 @@
           <a:solidFill>
             <a:srgbClr val="f59e0b"/>
           </a:solidFill>
-          <a:ln w="12700">
+          <a:ln w="12600">
             <a:solidFill>
               <a:srgbClr val="f59e0b"/>
             </a:solidFill>
@@ -5614,20 +6242,21 @@
                 <a:srgbClr val="000000"/>
               </a:solidFill>
               <a:latin typeface="Arial"/>
-            </a:endParaRPr>
-          </a:p>
-        </p:txBody>
-      </p:sp>
-      <p:sp>
-        <p:nvSpPr>
-          <p:cNvPr id="68" name="Shape 18"/>
+              <a:ea typeface="DejaVu Sans"/>
+            </a:endParaRPr>
+          </a:p>
+        </p:txBody>
+      </p:sp>
+      <p:sp>
+        <p:nvSpPr>
+          <p:cNvPr id="72" name="Shape 18"/>
           <p:cNvSpPr/>
           <p:nvPr/>
         </p:nvSpPr>
         <p:spPr>
           <a:xfrm>
             <a:off x="457200" y="3154680"/>
-            <a:ext cx="593640" cy="593640"/>
+            <a:ext cx="592920" cy="592920"/>
           </a:xfrm>
           <a:prstGeom prst="ellipse">
             <a:avLst/>
@@ -5637,7 +6266,7 @@
               <a:alpha val="15000"/>
             </a:srgbClr>
           </a:solidFill>
-          <a:ln w="12700">
+          <a:ln w="12600">
             <a:solidFill>
               <a:srgbClr val="f59e0b">
                 <a:alpha val="15000"/>
@@ -5667,20 +6296,21 @@
                 <a:srgbClr val="000000"/>
               </a:solidFill>
               <a:latin typeface="Arial"/>
-            </a:endParaRPr>
-          </a:p>
-        </p:txBody>
-      </p:sp>
-      <p:sp>
-        <p:nvSpPr>
-          <p:cNvPr id="69" name="Text 19"/>
+              <a:ea typeface="DejaVu Sans"/>
+            </a:endParaRPr>
+          </a:p>
+        </p:txBody>
+      </p:sp>
+      <p:sp>
+        <p:nvSpPr>
+          <p:cNvPr id="73" name="Text 19"/>
           <p:cNvSpPr/>
           <p:nvPr/>
         </p:nvSpPr>
         <p:spPr>
           <a:xfrm>
             <a:off x="457200" y="3154680"/>
-            <a:ext cx="593640" cy="593640"/>
+            <a:ext cx="592920" cy="592920"/>
           </a:xfrm>
           <a:prstGeom prst="rect">
             <a:avLst/>
@@ -5715,6 +6345,7 @@
                   <a:srgbClr val="000000"/>
                 </a:solidFill>
                 <a:latin typeface="Calibri"/>
+                <a:ea typeface="DejaVu Sans"/>
               </a:rPr>
               <a:t>📈</a:t>
             </a:r>
@@ -5729,14 +6360,14 @@
       </p:sp>
       <p:sp>
         <p:nvSpPr>
-          <p:cNvPr id="70" name="Text 20"/>
+          <p:cNvPr id="74" name="Text 20"/>
           <p:cNvSpPr/>
           <p:nvPr/>
         </p:nvSpPr>
         <p:spPr>
           <a:xfrm>
             <a:off x="1170360" y="3063240"/>
-            <a:ext cx="3108240" cy="273600"/>
+            <a:ext cx="3107520" cy="272880"/>
           </a:xfrm>
           <a:prstGeom prst="rect">
             <a:avLst/>
@@ -5771,6 +6402,7 @@
                   <a:srgbClr val="f59e0b"/>
                 </a:solidFill>
                 <a:latin typeface="Calibri"/>
+                <a:ea typeface="DejaVu Sans"/>
               </a:rPr>
               <a:t>Objectif 3</a:t>
             </a:r>
@@ -5785,14 +6417,14 @@
       </p:sp>
       <p:sp>
         <p:nvSpPr>
-          <p:cNvPr id="71" name="Text 21"/>
+          <p:cNvPr id="75" name="Text 21"/>
           <p:cNvSpPr/>
           <p:nvPr/>
         </p:nvSpPr>
         <p:spPr>
           <a:xfrm>
             <a:off x="1170360" y="3337560"/>
-            <a:ext cx="3108240" cy="365040"/>
+            <a:ext cx="3107520" cy="364320"/>
           </a:xfrm>
           <a:prstGeom prst="rect">
             <a:avLst/>
@@ -5827,6 +6459,7 @@
                   <a:srgbClr val="1e2761"/>
                 </a:solidFill>
                 <a:latin typeface="Calibri"/>
+                <a:ea typeface="DejaVu Sans"/>
               </a:rPr>
               <a:t>Eviter les pertes d’informations / erreurs de gestion</a:t>
             </a:r>
@@ -5841,14 +6474,14 @@
       </p:sp>
       <p:sp>
         <p:nvSpPr>
-          <p:cNvPr id="72" name="Text 22"/>
+          <p:cNvPr id="76" name="Text 22"/>
           <p:cNvSpPr/>
           <p:nvPr/>
         </p:nvSpPr>
         <p:spPr>
           <a:xfrm>
             <a:off x="457200" y="3931920"/>
-            <a:ext cx="3748320" cy="639360"/>
+            <a:ext cx="3747600" cy="638640"/>
           </a:xfrm>
           <a:prstGeom prst="rect">
             <a:avLst/>
@@ -5883,6 +6516,7 @@
                   <a:srgbClr val="64748b"/>
                 </a:solidFill>
                 <a:latin typeface="Calibri"/>
+                <a:ea typeface="DejaVu Sans"/>
               </a:rPr>
               <a:t>Grâçe à une base de données centraliser toutes les informations sont enregistrés et bien protégés.</a:t>
             </a:r>
@@ -5897,14 +6531,14 @@
       </p:sp>
       <p:sp>
         <p:nvSpPr>
-          <p:cNvPr id="73" name="Shape 23"/>
+          <p:cNvPr id="77" name="Shape 23"/>
           <p:cNvSpPr/>
           <p:nvPr/>
         </p:nvSpPr>
         <p:spPr>
           <a:xfrm>
             <a:off x="4754880" y="2926080"/>
-            <a:ext cx="4159800" cy="1736640"/>
+            <a:ext cx="4159080" cy="1735920"/>
           </a:xfrm>
           <a:prstGeom prst="rect">
             <a:avLst/>
@@ -5912,14 +6546,14 @@
           <a:solidFill>
             <a:srgbClr val="ffffff"/>
           </a:solidFill>
-          <a:ln w="12700">
+          <a:ln w="12600">
             <a:solidFill>
               <a:srgbClr val="e2e8f0"/>
             </a:solidFill>
             <a:round/>
           </a:ln>
           <a:effectLst>
-            <a:outerShdw algn="bl" blurRad="63360" dir="8100000" dist="25455" kx="0" ky="0" rotWithShape="0" sx="100000" sy="100000">
+            <a:outerShdw blurRad="63360" dir="8100000" dist="25455" rotWithShape="0">
               <a:srgbClr val="000000">
                 <a:alpha val="7000"/>
               </a:srgbClr>
@@ -5947,20 +6581,21 @@
                 <a:srgbClr val="000000"/>
               </a:solidFill>
               <a:latin typeface="Arial"/>
-            </a:endParaRPr>
-          </a:p>
-        </p:txBody>
-      </p:sp>
-      <p:sp>
-        <p:nvSpPr>
-          <p:cNvPr id="74" name="Shape 24"/>
+              <a:ea typeface="DejaVu Sans"/>
+            </a:endParaRPr>
+          </a:p>
+        </p:txBody>
+      </p:sp>
+      <p:sp>
+        <p:nvSpPr>
+          <p:cNvPr id="78" name="Shape 24"/>
           <p:cNvSpPr/>
           <p:nvPr/>
         </p:nvSpPr>
         <p:spPr>
           <a:xfrm>
             <a:off x="4754880" y="2926080"/>
-            <a:ext cx="4159800" cy="63360"/>
+            <a:ext cx="4159080" cy="62640"/>
           </a:xfrm>
           <a:prstGeom prst="rect">
             <a:avLst/>
@@ -5968,7 +6603,7 @@
           <a:solidFill>
             <a:srgbClr val="ef4444"/>
           </a:solidFill>
-          <a:ln w="12700">
+          <a:ln w="12600">
             <a:solidFill>
               <a:srgbClr val="ef4444"/>
             </a:solidFill>
@@ -5996,20 +6631,21 @@
                 <a:srgbClr val="ffffff"/>
               </a:solidFill>
               <a:latin typeface="Arial"/>
-            </a:endParaRPr>
-          </a:p>
-        </p:txBody>
-      </p:sp>
-      <p:sp>
-        <p:nvSpPr>
-          <p:cNvPr id="75" name="Shape 25"/>
+              <a:ea typeface="DejaVu Sans"/>
+            </a:endParaRPr>
+          </a:p>
+        </p:txBody>
+      </p:sp>
+      <p:sp>
+        <p:nvSpPr>
+          <p:cNvPr id="79" name="Shape 25"/>
           <p:cNvSpPr/>
           <p:nvPr/>
         </p:nvSpPr>
         <p:spPr>
           <a:xfrm>
             <a:off x="4937760" y="3154680"/>
-            <a:ext cx="593640" cy="593640"/>
+            <a:ext cx="592920" cy="592920"/>
           </a:xfrm>
           <a:prstGeom prst="ellipse">
             <a:avLst/>
@@ -6019,7 +6655,7 @@
               <a:alpha val="15000"/>
             </a:srgbClr>
           </a:solidFill>
-          <a:ln w="12700">
+          <a:ln w="12600">
             <a:solidFill>
               <a:srgbClr val="ef4444">
                 <a:alpha val="15000"/>
@@ -6049,20 +6685,21 @@
                 <a:srgbClr val="ffffff"/>
               </a:solidFill>
               <a:latin typeface="Arial"/>
-            </a:endParaRPr>
-          </a:p>
-        </p:txBody>
-      </p:sp>
-      <p:sp>
-        <p:nvSpPr>
-          <p:cNvPr id="76" name="Text 26"/>
+              <a:ea typeface="DejaVu Sans"/>
+            </a:endParaRPr>
+          </a:p>
+        </p:txBody>
+      </p:sp>
+      <p:sp>
+        <p:nvSpPr>
+          <p:cNvPr id="80" name="Text 26"/>
           <p:cNvSpPr/>
           <p:nvPr/>
         </p:nvSpPr>
         <p:spPr>
           <a:xfrm>
             <a:off x="4937760" y="3154680"/>
-            <a:ext cx="593640" cy="593640"/>
+            <a:ext cx="592920" cy="592920"/>
           </a:xfrm>
           <a:prstGeom prst="rect">
             <a:avLst/>
@@ -6097,6 +6734,7 @@
                   <a:srgbClr val="000000"/>
                 </a:solidFill>
                 <a:latin typeface="Calibri"/>
+                <a:ea typeface="DejaVu Sans"/>
               </a:rPr>
               <a:t>🔒</a:t>
             </a:r>
@@ -6111,14 +6749,14 @@
       </p:sp>
       <p:sp>
         <p:nvSpPr>
-          <p:cNvPr id="77" name="Text 27"/>
+          <p:cNvPr id="81" name="Text 27"/>
           <p:cNvSpPr/>
           <p:nvPr/>
         </p:nvSpPr>
         <p:spPr>
           <a:xfrm>
             <a:off x="5650920" y="3063240"/>
-            <a:ext cx="3108240" cy="273600"/>
+            <a:ext cx="3107520" cy="272880"/>
           </a:xfrm>
           <a:prstGeom prst="rect">
             <a:avLst/>
@@ -6153,6 +6791,7 @@
                   <a:srgbClr val="ef4444"/>
                 </a:solidFill>
                 <a:latin typeface="Calibri"/>
+                <a:ea typeface="DejaVu Sans"/>
               </a:rPr>
               <a:t>Objectif 4</a:t>
             </a:r>
@@ -6167,14 +6806,14 @@
       </p:sp>
       <p:sp>
         <p:nvSpPr>
-          <p:cNvPr id="78" name="Text 28"/>
+          <p:cNvPr id="82" name="Text 28"/>
           <p:cNvSpPr/>
           <p:nvPr/>
         </p:nvSpPr>
         <p:spPr>
           <a:xfrm>
             <a:off x="5650920" y="3337560"/>
-            <a:ext cx="3108240" cy="365040"/>
+            <a:ext cx="3107520" cy="364320"/>
           </a:xfrm>
           <a:prstGeom prst="rect">
             <a:avLst/>
@@ -6209,6 +6848,7 @@
                   <a:srgbClr val="1e2761"/>
                 </a:solidFill>
                 <a:latin typeface="Calibri"/>
+                <a:ea typeface="DejaVu Sans"/>
               </a:rPr>
               <a:t>Sécuriser les accès</a:t>
             </a:r>
@@ -6223,14 +6863,14 @@
       </p:sp>
       <p:sp>
         <p:nvSpPr>
-          <p:cNvPr id="79" name="Text 29"/>
+          <p:cNvPr id="83" name="Text 29"/>
           <p:cNvSpPr/>
           <p:nvPr/>
         </p:nvSpPr>
         <p:spPr>
           <a:xfrm>
             <a:off x="4937760" y="3931920"/>
-            <a:ext cx="3748320" cy="639360"/>
+            <a:ext cx="3747600" cy="638640"/>
           </a:xfrm>
           <a:prstGeom prst="rect">
             <a:avLst/>
@@ -6251,19 +6891,17 @@
             <a:noAutofit/>
           </a:bodyPr>
           <a:p>
-            <a:pPr defTabSz="914400">
-              <a:lnSpc>
-                <a:spcPct val="100000"/>
-              </a:lnSpc>
-              <a:tabLst>
-                <a:tab algn="l" pos="0"/>
-              </a:tabLst>
+            <a:pPr>
+              <a:lnSpc>
+                <a:spcPct val="100000"/>
+              </a:lnSpc>
             </a:pPr>
             <a:endParaRPr b="0" lang="en-US" sz="1800" spc="-1" strike="noStrike">
               <a:solidFill>
                 <a:srgbClr val="000000"/>
               </a:solidFill>
               <a:latin typeface="Arial"/>
+              <a:ea typeface="DejaVu Sans"/>
             </a:endParaRPr>
           </a:p>
         </p:txBody>
@@ -6307,14 +6945,14 @@
       </p:grpSpPr>
       <p:sp>
         <p:nvSpPr>
-          <p:cNvPr id="80" name="Shape 0"/>
+          <p:cNvPr id="84" name="Shape 0"/>
           <p:cNvSpPr/>
           <p:nvPr/>
         </p:nvSpPr>
         <p:spPr>
           <a:xfrm>
             <a:off x="0" y="0"/>
-            <a:ext cx="9143280" cy="776520"/>
+            <a:ext cx="9142560" cy="775800"/>
           </a:xfrm>
           <a:prstGeom prst="rect">
             <a:avLst/>
@@ -6322,7 +6960,7 @@
           <a:solidFill>
             <a:srgbClr val="1e2761"/>
           </a:solidFill>
-          <a:ln w="12700">
+          <a:ln w="12600">
             <a:solidFill>
               <a:srgbClr val="1e2761"/>
             </a:solidFill>
@@ -6350,20 +6988,21 @@
                 <a:srgbClr val="ffffff"/>
               </a:solidFill>
               <a:latin typeface="Arial"/>
-            </a:endParaRPr>
-          </a:p>
-        </p:txBody>
-      </p:sp>
-      <p:sp>
-        <p:nvSpPr>
-          <p:cNvPr id="81" name="Text 1"/>
+              <a:ea typeface="DejaVu Sans"/>
+            </a:endParaRPr>
+          </a:p>
+        </p:txBody>
+      </p:sp>
+      <p:sp>
+        <p:nvSpPr>
+          <p:cNvPr id="85" name="Text 1"/>
           <p:cNvSpPr/>
           <p:nvPr/>
         </p:nvSpPr>
         <p:spPr>
           <a:xfrm>
             <a:off x="365760" y="0"/>
-            <a:ext cx="8228880" cy="776520"/>
+            <a:ext cx="8228160" cy="775800"/>
           </a:xfrm>
           <a:prstGeom prst="rect">
             <a:avLst/>
@@ -6398,6 +7037,7 @@
                   <a:srgbClr val="ffffff"/>
                 </a:solidFill>
                 <a:latin typeface="Calibri"/>
+                <a:ea typeface="DejaVu Sans"/>
               </a:rPr>
               <a:t>03  |  Architecture Technique</a:t>
             </a:r>
@@ -6412,14 +7052,14 @@
       </p:sp>
       <p:sp>
         <p:nvSpPr>
-          <p:cNvPr id="82" name="Shape 2"/>
+          <p:cNvPr id="86" name="Shape 2"/>
           <p:cNvSpPr/>
           <p:nvPr/>
         </p:nvSpPr>
         <p:spPr>
           <a:xfrm>
             <a:off x="320040" y="960120"/>
-            <a:ext cx="8503200" cy="685080"/>
+            <a:ext cx="8502480" cy="684360"/>
           </a:xfrm>
           <a:prstGeom prst="rect">
             <a:avLst/>
@@ -6429,7 +7069,7 @@
               <a:alpha val="10000"/>
             </a:srgbClr>
           </a:solidFill>
-          <a:ln w="12700">
+          <a:ln w="12600">
             <a:solidFill>
               <a:srgbClr val="4fc3f7">
                 <a:alpha val="40000"/>
@@ -6459,20 +7099,21 @@
                 <a:srgbClr val="000000"/>
               </a:solidFill>
               <a:latin typeface="Arial"/>
-            </a:endParaRPr>
-          </a:p>
-        </p:txBody>
-      </p:sp>
-      <p:sp>
-        <p:nvSpPr>
-          <p:cNvPr id="83" name="Shape 3"/>
+              <a:ea typeface="DejaVu Sans"/>
+            </a:endParaRPr>
+          </a:p>
+        </p:txBody>
+      </p:sp>
+      <p:sp>
+        <p:nvSpPr>
+          <p:cNvPr id="87" name="Shape 3"/>
           <p:cNvSpPr/>
           <p:nvPr/>
         </p:nvSpPr>
         <p:spPr>
           <a:xfrm>
             <a:off x="320040" y="960120"/>
-            <a:ext cx="54000" cy="685080"/>
+            <a:ext cx="53280" cy="684360"/>
           </a:xfrm>
           <a:prstGeom prst="rect">
             <a:avLst/>
@@ -6480,7 +7121,7 @@
           <a:solidFill>
             <a:srgbClr val="4fc3f7"/>
           </a:solidFill>
-          <a:ln w="12700">
+          <a:ln w="12600">
             <a:solidFill>
               <a:srgbClr val="4fc3f7"/>
             </a:solidFill>
@@ -6508,20 +7149,21 @@
                 <a:srgbClr val="000000"/>
               </a:solidFill>
               <a:latin typeface="Arial"/>
-            </a:endParaRPr>
-          </a:p>
-        </p:txBody>
-      </p:sp>
-      <p:sp>
-        <p:nvSpPr>
-          <p:cNvPr id="84" name="Text 4"/>
+              <a:ea typeface="DejaVu Sans"/>
+            </a:endParaRPr>
+          </a:p>
+        </p:txBody>
+      </p:sp>
+      <p:sp>
+        <p:nvSpPr>
+          <p:cNvPr id="88" name="Text 4"/>
           <p:cNvSpPr/>
           <p:nvPr/>
         </p:nvSpPr>
         <p:spPr>
           <a:xfrm>
             <a:off x="502920" y="960120"/>
-            <a:ext cx="2010960" cy="685080"/>
+            <a:ext cx="2010240" cy="684360"/>
           </a:xfrm>
           <a:prstGeom prst="rect">
             <a:avLst/>
@@ -6556,6 +7198,7 @@
                   <a:srgbClr val="4fc3f7"/>
                 </a:solidFill>
                 <a:latin typeface="Calibri"/>
+                <a:ea typeface="DejaVu Sans"/>
               </a:rPr>
               <a:t>FRONTEND</a:t>
             </a:r>
@@ -6570,14 +7213,14 @@
       </p:sp>
       <p:sp>
         <p:nvSpPr>
-          <p:cNvPr id="85" name="Text 5"/>
+          <p:cNvPr id="89" name="Text 5"/>
           <p:cNvSpPr/>
           <p:nvPr/>
         </p:nvSpPr>
         <p:spPr>
           <a:xfrm>
             <a:off x="2560320" y="960120"/>
-            <a:ext cx="6125760" cy="685080"/>
+            <a:ext cx="6125040" cy="684360"/>
           </a:xfrm>
           <a:prstGeom prst="rect">
             <a:avLst/>
@@ -6612,6 +7255,7 @@
                   <a:srgbClr val="1e2761"/>
                 </a:solidFill>
                 <a:latin typeface="Calibri"/>
+                <a:ea typeface="DejaVu Sans"/>
               </a:rPr>
               <a:t>HTML/CSS  •  JavaScript  •  Bootstrap</a:t>
             </a:r>
@@ -6626,14 +7270,14 @@
       </p:sp>
       <p:sp>
         <p:nvSpPr>
-          <p:cNvPr id="86" name="Shape 6"/>
+          <p:cNvPr id="90" name="Shape 6"/>
           <p:cNvSpPr/>
           <p:nvPr/>
         </p:nvSpPr>
         <p:spPr>
           <a:xfrm>
             <a:off x="320040" y="1783080"/>
-            <a:ext cx="8503200" cy="685080"/>
+            <a:ext cx="8502480" cy="684360"/>
           </a:xfrm>
           <a:prstGeom prst="rect">
             <a:avLst/>
@@ -6643,7 +7287,7 @@
               <a:alpha val="10000"/>
             </a:srgbClr>
           </a:solidFill>
-          <a:ln w="12700">
+          <a:ln w="12600">
             <a:solidFill>
               <a:srgbClr val="22c55e">
                 <a:alpha val="40000"/>
@@ -6673,20 +7317,21 @@
                 <a:srgbClr val="ffffff"/>
               </a:solidFill>
               <a:latin typeface="Arial"/>
-            </a:endParaRPr>
-          </a:p>
-        </p:txBody>
-      </p:sp>
-      <p:sp>
-        <p:nvSpPr>
-          <p:cNvPr id="87" name="Shape 7"/>
+              <a:ea typeface="DejaVu Sans"/>
+            </a:endParaRPr>
+          </a:p>
+        </p:txBody>
+      </p:sp>
+      <p:sp>
+        <p:nvSpPr>
+          <p:cNvPr id="91" name="Shape 7"/>
           <p:cNvSpPr/>
           <p:nvPr/>
         </p:nvSpPr>
         <p:spPr>
           <a:xfrm>
             <a:off x="320040" y="1783080"/>
-            <a:ext cx="54000" cy="685080"/>
+            <a:ext cx="53280" cy="684360"/>
           </a:xfrm>
           <a:prstGeom prst="rect">
             <a:avLst/>
@@ -6694,7 +7339,7 @@
           <a:solidFill>
             <a:srgbClr val="22c55e"/>
           </a:solidFill>
-          <a:ln w="12700">
+          <a:ln w="12600">
             <a:solidFill>
               <a:srgbClr val="22c55e"/>
             </a:solidFill>
@@ -6722,20 +7367,21 @@
                 <a:srgbClr val="ffffff"/>
               </a:solidFill>
               <a:latin typeface="Arial"/>
-            </a:endParaRPr>
-          </a:p>
-        </p:txBody>
-      </p:sp>
-      <p:sp>
-        <p:nvSpPr>
-          <p:cNvPr id="88" name="Text 8"/>
+              <a:ea typeface="DejaVu Sans"/>
+            </a:endParaRPr>
+          </a:p>
+        </p:txBody>
+      </p:sp>
+      <p:sp>
+        <p:nvSpPr>
+          <p:cNvPr id="92" name="Text 8"/>
           <p:cNvSpPr/>
           <p:nvPr/>
         </p:nvSpPr>
         <p:spPr>
           <a:xfrm>
             <a:off x="502920" y="1783080"/>
-            <a:ext cx="2010960" cy="685080"/>
+            <a:ext cx="2010240" cy="684360"/>
           </a:xfrm>
           <a:prstGeom prst="rect">
             <a:avLst/>
@@ -6770,6 +7416,7 @@
                   <a:srgbClr val="22c55e"/>
                 </a:solidFill>
                 <a:latin typeface="Calibri"/>
+                <a:ea typeface="DejaVu Sans"/>
               </a:rPr>
               <a:t>BACKEND</a:t>
             </a:r>
@@ -6784,14 +7431,14 @@
       </p:sp>
       <p:sp>
         <p:nvSpPr>
-          <p:cNvPr id="89" name="Text 9"/>
+          <p:cNvPr id="93" name="Text 9"/>
           <p:cNvSpPr/>
           <p:nvPr/>
         </p:nvSpPr>
         <p:spPr>
           <a:xfrm>
             <a:off x="2560320" y="1783080"/>
-            <a:ext cx="6125760" cy="685080"/>
+            <a:ext cx="6125040" cy="684360"/>
           </a:xfrm>
           <a:prstGeom prst="rect">
             <a:avLst/>
@@ -6826,6 +7473,7 @@
                   <a:srgbClr val="1e2761"/>
                 </a:solidFill>
                 <a:latin typeface="Calibri"/>
+                <a:ea typeface="DejaVu Sans"/>
               </a:rPr>
               <a:t>Django    </a:t>
             </a:r>
@@ -6840,14 +7488,14 @@
       </p:sp>
       <p:sp>
         <p:nvSpPr>
-          <p:cNvPr id="90" name="Shape 10"/>
+          <p:cNvPr id="94" name="Shape 10"/>
           <p:cNvSpPr/>
           <p:nvPr/>
         </p:nvSpPr>
         <p:spPr>
           <a:xfrm>
             <a:off x="320040" y="2606040"/>
-            <a:ext cx="8503200" cy="685080"/>
+            <a:ext cx="8502480" cy="684360"/>
           </a:xfrm>
           <a:prstGeom prst="rect">
             <a:avLst/>
@@ -6857,7 +7505,7 @@
               <a:alpha val="10000"/>
             </a:srgbClr>
           </a:solidFill>
-          <a:ln w="12700">
+          <a:ln w="12600">
             <a:solidFill>
               <a:srgbClr val="f59e0b">
                 <a:alpha val="40000"/>
@@ -6887,20 +7535,21 @@
                 <a:srgbClr val="000000"/>
               </a:solidFill>
               <a:latin typeface="Arial"/>
-            </a:endParaRPr>
-          </a:p>
-        </p:txBody>
-      </p:sp>
-      <p:sp>
-        <p:nvSpPr>
-          <p:cNvPr id="91" name="Shape 11"/>
+              <a:ea typeface="DejaVu Sans"/>
+            </a:endParaRPr>
+          </a:p>
+        </p:txBody>
+      </p:sp>
+      <p:sp>
+        <p:nvSpPr>
+          <p:cNvPr id="95" name="Shape 11"/>
           <p:cNvSpPr/>
           <p:nvPr/>
         </p:nvSpPr>
         <p:spPr>
           <a:xfrm>
             <a:off x="320040" y="2606040"/>
-            <a:ext cx="54000" cy="685080"/>
+            <a:ext cx="53280" cy="684360"/>
           </a:xfrm>
           <a:prstGeom prst="rect">
             <a:avLst/>
@@ -6908,7 +7557,7 @@
           <a:solidFill>
             <a:srgbClr val="f59e0b"/>
           </a:solidFill>
-          <a:ln w="12700">
+          <a:ln w="12600">
             <a:solidFill>
               <a:srgbClr val="f59e0b"/>
             </a:solidFill>
@@ -6936,20 +7585,21 @@
                 <a:srgbClr val="000000"/>
               </a:solidFill>
               <a:latin typeface="Arial"/>
-            </a:endParaRPr>
-          </a:p>
-        </p:txBody>
-      </p:sp>
-      <p:sp>
-        <p:nvSpPr>
-          <p:cNvPr id="92" name="Text 12"/>
+              <a:ea typeface="DejaVu Sans"/>
+            </a:endParaRPr>
+          </a:p>
+        </p:txBody>
+      </p:sp>
+      <p:sp>
+        <p:nvSpPr>
+          <p:cNvPr id="96" name="Text 12"/>
           <p:cNvSpPr/>
           <p:nvPr/>
         </p:nvSpPr>
         <p:spPr>
           <a:xfrm>
             <a:off x="502920" y="2606040"/>
-            <a:ext cx="2010960" cy="685080"/>
+            <a:ext cx="2010240" cy="684360"/>
           </a:xfrm>
           <a:prstGeom prst="rect">
             <a:avLst/>
@@ -6984,6 +7634,7 @@
                   <a:srgbClr val="f59e0b"/>
                 </a:solidFill>
                 <a:latin typeface="Calibri"/>
+                <a:ea typeface="DejaVu Sans"/>
               </a:rPr>
               <a:t>BASE DE DONNÉES</a:t>
             </a:r>
@@ -6998,14 +7649,14 @@
       </p:sp>
       <p:sp>
         <p:nvSpPr>
-          <p:cNvPr id="93" name="Text 13"/>
+          <p:cNvPr id="97" name="Text 13"/>
           <p:cNvSpPr/>
           <p:nvPr/>
         </p:nvSpPr>
         <p:spPr>
           <a:xfrm>
             <a:off x="2560320" y="2606040"/>
-            <a:ext cx="6125760" cy="685080"/>
+            <a:ext cx="6125040" cy="684360"/>
           </a:xfrm>
           <a:prstGeom prst="rect">
             <a:avLst/>
@@ -7040,6 +7691,7 @@
                   <a:srgbClr val="1e2761"/>
                 </a:solidFill>
                 <a:latin typeface="Calibri"/>
+                <a:ea typeface="DejaVu Sans"/>
               </a:rPr>
               <a:t>SQLite3</a:t>
             </a:r>
@@ -7054,14 +7706,14 @@
       </p:sp>
       <p:sp>
         <p:nvSpPr>
-          <p:cNvPr id="94" name="Shape 14"/>
+          <p:cNvPr id="98" name="Shape 14"/>
           <p:cNvSpPr/>
           <p:nvPr/>
         </p:nvSpPr>
         <p:spPr>
           <a:xfrm>
             <a:off x="320040" y="3429000"/>
-            <a:ext cx="8503200" cy="685080"/>
+            <a:ext cx="8502480" cy="684360"/>
           </a:xfrm>
           <a:prstGeom prst="rect">
             <a:avLst/>
@@ -7071,7 +7723,7 @@
               <a:alpha val="10000"/>
             </a:srgbClr>
           </a:solidFill>
-          <a:ln w="12700">
+          <a:ln w="12600">
             <a:solidFill>
               <a:srgbClr val="9333ea">
                 <a:alpha val="40000"/>
@@ -7101,20 +7753,21 @@
                 <a:srgbClr val="ffffff"/>
               </a:solidFill>
               <a:latin typeface="Arial"/>
-            </a:endParaRPr>
-          </a:p>
-        </p:txBody>
-      </p:sp>
-      <p:sp>
-        <p:nvSpPr>
-          <p:cNvPr id="95" name="Shape 15"/>
+              <a:ea typeface="DejaVu Sans"/>
+            </a:endParaRPr>
+          </a:p>
+        </p:txBody>
+      </p:sp>
+      <p:sp>
+        <p:nvSpPr>
+          <p:cNvPr id="99" name="Shape 15"/>
           <p:cNvSpPr/>
           <p:nvPr/>
         </p:nvSpPr>
         <p:spPr>
           <a:xfrm>
             <a:off x="320040" y="3429000"/>
-            <a:ext cx="54000" cy="685080"/>
+            <a:ext cx="53280" cy="684360"/>
           </a:xfrm>
           <a:prstGeom prst="rect">
             <a:avLst/>
@@ -7122,7 +7775,7 @@
           <a:solidFill>
             <a:srgbClr val="9333ea"/>
           </a:solidFill>
-          <a:ln w="12700">
+          <a:ln w="12600">
             <a:solidFill>
               <a:srgbClr val="9333ea"/>
             </a:solidFill>
@@ -7150,20 +7803,21 @@
                 <a:srgbClr val="ffffff"/>
               </a:solidFill>
               <a:latin typeface="Arial"/>
-            </a:endParaRPr>
-          </a:p>
-        </p:txBody>
-      </p:sp>
-      <p:sp>
-        <p:nvSpPr>
-          <p:cNvPr id="96" name="Text 16"/>
+              <a:ea typeface="DejaVu Sans"/>
+            </a:endParaRPr>
+          </a:p>
+        </p:txBody>
+      </p:sp>
+      <p:sp>
+        <p:nvSpPr>
+          <p:cNvPr id="100" name="Text 16"/>
           <p:cNvSpPr/>
           <p:nvPr/>
         </p:nvSpPr>
         <p:spPr>
           <a:xfrm>
             <a:off x="502920" y="3429000"/>
-            <a:ext cx="2010960" cy="685080"/>
+            <a:ext cx="2010240" cy="684360"/>
           </a:xfrm>
           <a:prstGeom prst="rect">
             <a:avLst/>
@@ -7198,6 +7852,7 @@
                   <a:srgbClr val="9333ea"/>
                 </a:solidFill>
                 <a:latin typeface="Calibri"/>
+                <a:ea typeface="DejaVu Sans"/>
               </a:rPr>
               <a:t>Modèle</a:t>
             </a:r>
@@ -7212,14 +7867,14 @@
       </p:sp>
       <p:sp>
         <p:nvSpPr>
-          <p:cNvPr id="97" name="Text 17"/>
+          <p:cNvPr id="101" name="Text 17"/>
           <p:cNvSpPr/>
           <p:nvPr/>
         </p:nvSpPr>
         <p:spPr>
           <a:xfrm>
             <a:off x="2560320" y="3429000"/>
-            <a:ext cx="6125760" cy="685080"/>
+            <a:ext cx="6125040" cy="684360"/>
           </a:xfrm>
           <a:prstGeom prst="rect">
             <a:avLst/>
@@ -7254,6 +7909,7 @@
                   <a:srgbClr val="1e2761"/>
                 </a:solidFill>
                 <a:latin typeface="Calibri"/>
+                <a:ea typeface="DejaVu Sans"/>
               </a:rPr>
               <a:t>Modèle &lt;-----→ View &lt;----&gt;Template</a:t>
             </a:r>
@@ -7268,14 +7924,14 @@
       </p:sp>
       <p:sp>
         <p:nvSpPr>
-          <p:cNvPr id="98" name="Text 19"/>
+          <p:cNvPr id="102" name="Text 19"/>
           <p:cNvSpPr/>
           <p:nvPr/>
         </p:nvSpPr>
         <p:spPr>
           <a:xfrm>
             <a:off x="777240" y="4343400"/>
-            <a:ext cx="2468160" cy="639360"/>
+            <a:ext cx="2467440" cy="638640"/>
           </a:xfrm>
           <a:prstGeom prst="rect">
             <a:avLst/>
@@ -7296,33 +7952,31 @@
             <a:noAutofit/>
           </a:bodyPr>
           <a:p>
-            <a:pPr algn="ctr" defTabSz="914400">
-              <a:lnSpc>
-                <a:spcPct val="100000"/>
-              </a:lnSpc>
-              <a:tabLst>
-                <a:tab algn="l" pos="0"/>
-              </a:tabLst>
+            <a:pPr>
+              <a:lnSpc>
+                <a:spcPct val="100000"/>
+              </a:lnSpc>
             </a:pPr>
             <a:endParaRPr b="0" lang="en-US" sz="1800" spc="-1" strike="noStrike">
               <a:solidFill>
                 <a:srgbClr val="000000"/>
               </a:solidFill>
               <a:latin typeface="Arial"/>
-            </a:endParaRPr>
-          </a:p>
-        </p:txBody>
-      </p:sp>
-      <p:sp>
-        <p:nvSpPr>
-          <p:cNvPr id="99" name="Text 21"/>
+              <a:ea typeface="DejaVu Sans"/>
+            </a:endParaRPr>
+          </a:p>
+        </p:txBody>
+      </p:sp>
+      <p:sp>
+        <p:nvSpPr>
+          <p:cNvPr id="103" name="Text 21"/>
           <p:cNvSpPr/>
           <p:nvPr/>
         </p:nvSpPr>
         <p:spPr>
           <a:xfrm>
             <a:off x="3611880" y="4343400"/>
-            <a:ext cx="2468160" cy="639360"/>
+            <a:ext cx="2467440" cy="638640"/>
           </a:xfrm>
           <a:prstGeom prst="rect">
             <a:avLst/>
@@ -7343,33 +7997,31 @@
             <a:noAutofit/>
           </a:bodyPr>
           <a:p>
-            <a:pPr algn="ctr" defTabSz="914400">
-              <a:lnSpc>
-                <a:spcPct val="100000"/>
-              </a:lnSpc>
-              <a:tabLst>
-                <a:tab algn="l" pos="0"/>
-              </a:tabLst>
+            <a:pPr>
+              <a:lnSpc>
+                <a:spcPct val="100000"/>
+              </a:lnSpc>
             </a:pPr>
             <a:endParaRPr b="0" lang="en-US" sz="1800" spc="-1" strike="noStrike">
               <a:solidFill>
                 <a:srgbClr val="000000"/>
               </a:solidFill>
               <a:latin typeface="Arial"/>
-            </a:endParaRPr>
-          </a:p>
-        </p:txBody>
-      </p:sp>
-      <p:sp>
-        <p:nvSpPr>
-          <p:cNvPr id="100" name="Text 23"/>
+              <a:ea typeface="DejaVu Sans"/>
+            </a:endParaRPr>
+          </a:p>
+        </p:txBody>
+      </p:sp>
+      <p:sp>
+        <p:nvSpPr>
+          <p:cNvPr id="104" name="Text 23"/>
           <p:cNvSpPr/>
           <p:nvPr/>
         </p:nvSpPr>
         <p:spPr>
           <a:xfrm>
             <a:off x="6446520" y="4343400"/>
-            <a:ext cx="2468160" cy="639360"/>
+            <a:ext cx="2467440" cy="638640"/>
           </a:xfrm>
           <a:prstGeom prst="rect">
             <a:avLst/>
@@ -7390,19 +8042,17 @@
             <a:noAutofit/>
           </a:bodyPr>
           <a:p>
-            <a:pPr algn="ctr" defTabSz="914400">
-              <a:lnSpc>
-                <a:spcPct val="100000"/>
-              </a:lnSpc>
-              <a:tabLst>
-                <a:tab algn="l" pos="0"/>
-              </a:tabLst>
+            <a:pPr>
+              <a:lnSpc>
+                <a:spcPct val="100000"/>
+              </a:lnSpc>
             </a:pPr>
             <a:endParaRPr b="0" lang="en-US" sz="1800" spc="-1" strike="noStrike">
               <a:solidFill>
                 <a:srgbClr val="000000"/>
               </a:solidFill>
               <a:latin typeface="Arial"/>
+              <a:ea typeface="DejaVu Sans"/>
             </a:endParaRPr>
           </a:p>
         </p:txBody>
@@ -7426,7 +8076,7 @@
     <p:bg>
       <p:bgPr>
         <a:solidFill>
-          <a:srgbClr val="f4f7fc"/>
+          <a:srgbClr val="ffffff"/>
         </a:solidFill>
       </p:bgPr>
     </p:bg>
@@ -7446,14 +8096,14 @@
       </p:grpSpPr>
       <p:sp>
         <p:nvSpPr>
-          <p:cNvPr id="101" name="Shape 0"/>
+          <p:cNvPr id="105" name="Shape 13"/>
           <p:cNvSpPr/>
           <p:nvPr/>
         </p:nvSpPr>
         <p:spPr>
           <a:xfrm>
             <a:off x="0" y="0"/>
-            <a:ext cx="9143280" cy="685440"/>
+            <a:ext cx="9142560" cy="775800"/>
           </a:xfrm>
           <a:prstGeom prst="rect">
             <a:avLst/>
@@ -7461,7 +8111,7 @@
           <a:solidFill>
             <a:srgbClr val="1e2761"/>
           </a:solidFill>
-          <a:ln w="12700">
+          <a:ln w="12600">
             <a:solidFill>
               <a:srgbClr val="1e2761"/>
             </a:solidFill>
@@ -7479,30 +8129,26 @@
             <a:noAutofit/>
           </a:bodyPr>
           <a:p>
-            <a:pPr>
-              <a:lnSpc>
-                <a:spcPct val="100000"/>
-              </a:lnSpc>
-            </a:pPr>
             <a:endParaRPr b="0" lang="en-US" sz="1800" spc="-1" strike="noStrike">
               <a:solidFill>
                 <a:srgbClr val="ffffff"/>
               </a:solidFill>
               <a:latin typeface="Arial"/>
-            </a:endParaRPr>
-          </a:p>
-        </p:txBody>
-      </p:sp>
-      <p:sp>
-        <p:nvSpPr>
-          <p:cNvPr id="102" name="Text 1"/>
+              <a:ea typeface="DejaVu Sans"/>
+            </a:endParaRPr>
+          </a:p>
+        </p:txBody>
+      </p:sp>
+      <p:sp>
+        <p:nvSpPr>
+          <p:cNvPr id="106" name="Text 10"/>
           <p:cNvSpPr/>
           <p:nvPr/>
         </p:nvSpPr>
         <p:spPr>
           <a:xfrm>
             <a:off x="365760" y="0"/>
-            <a:ext cx="8228880" cy="776520"/>
+            <a:ext cx="8228160" cy="775800"/>
           </a:xfrm>
           <a:prstGeom prst="rect">
             <a:avLst/>
@@ -7537,8 +8183,9 @@
                   <a:srgbClr val="ffffff"/>
                 </a:solidFill>
                 <a:latin typeface="Calibri"/>
-              </a:rPr>
-              <a:t>04  |  Les utilisateurs et fontionnalités clés</a:t>
+                <a:ea typeface="DejaVu Sans"/>
+              </a:rPr>
+              <a:t>04  |  Démonstration</a:t>
             </a:r>
             <a:endParaRPr b="0" lang="en-US" sz="1800" spc="-1" strike="noStrike">
               <a:solidFill>
@@ -7551,14 +8198,14 @@
       </p:sp>
       <p:sp>
         <p:nvSpPr>
-          <p:cNvPr id="103" name="Text 3"/>
-          <p:cNvSpPr/>
-          <p:nvPr/>
-        </p:nvSpPr>
-        <p:spPr>
-          <a:xfrm>
-            <a:off x="274320" y="914400"/>
-            <a:ext cx="2742480" cy="346680"/>
+          <p:cNvPr id="107" name="Text 43"/>
+          <p:cNvSpPr/>
+          <p:nvPr/>
+        </p:nvSpPr>
+        <p:spPr>
+          <a:xfrm>
+            <a:off x="777240" y="4343400"/>
+            <a:ext cx="2467440" cy="638640"/>
           </a:xfrm>
           <a:prstGeom prst="rect">
             <a:avLst/>
@@ -7579,42 +8226,26 @@
             <a:noAutofit/>
           </a:bodyPr>
           <a:p>
-            <a:pPr algn="ctr" defTabSz="914400">
-              <a:lnSpc>
-                <a:spcPct val="100000"/>
-              </a:lnSpc>
-              <a:tabLst>
-                <a:tab algn="l" pos="0"/>
-              </a:tabLst>
-            </a:pPr>
-            <a:r>
-              <a:rPr b="1" lang="en-US" sz="1000" spc="-1" strike="noStrike">
-                <a:solidFill>
-                  <a:srgbClr val="ffffff"/>
-                </a:solidFill>
-                <a:latin typeface="Calibri"/>
-              </a:rPr>
-              <a:t>Phase</a:t>
-            </a:r>
-            <a:endParaRPr b="0" lang="en-US" sz="1000" spc="-1" strike="noStrike">
-              <a:solidFill>
-                <a:srgbClr val="000000"/>
-              </a:solidFill>
-              <a:latin typeface="Arial"/>
-            </a:endParaRPr>
-          </a:p>
-        </p:txBody>
-      </p:sp>
-      <p:sp>
-        <p:nvSpPr>
-          <p:cNvPr id="104" name="Text 22"/>
-          <p:cNvSpPr/>
-          <p:nvPr/>
-        </p:nvSpPr>
-        <p:spPr>
-          <a:xfrm>
-            <a:off x="4343400" y="2350080"/>
-            <a:ext cx="2239560" cy="319320"/>
+            <a:endParaRPr b="0" lang="en-US" sz="1800" spc="-1" strike="noStrike">
+              <a:solidFill>
+                <a:srgbClr val="000000"/>
+              </a:solidFill>
+              <a:latin typeface="Arial"/>
+              <a:ea typeface="DejaVu Sans"/>
+            </a:endParaRPr>
+          </a:p>
+        </p:txBody>
+      </p:sp>
+      <p:sp>
+        <p:nvSpPr>
+          <p:cNvPr id="108" name="Text 44"/>
+          <p:cNvSpPr/>
+          <p:nvPr/>
+        </p:nvSpPr>
+        <p:spPr>
+          <a:xfrm>
+            <a:off x="3611880" y="4343400"/>
+            <a:ext cx="2467440" cy="638640"/>
           </a:xfrm>
           <a:prstGeom prst="rect">
             <a:avLst/>
@@ -7635,42 +8266,26 @@
             <a:noAutofit/>
           </a:bodyPr>
           <a:p>
-            <a:pPr algn="ctr" defTabSz="914400">
-              <a:lnSpc>
-                <a:spcPct val="100000"/>
-              </a:lnSpc>
-              <a:tabLst>
-                <a:tab algn="l" pos="0"/>
-              </a:tabLst>
-            </a:pPr>
-            <a:r>
-              <a:rPr b="1" lang="en-US" sz="800" spc="-1" strike="noStrike">
-                <a:solidFill>
-                  <a:srgbClr val="ffffff"/>
-                </a:solidFill>
-                <a:latin typeface="Calibri"/>
-              </a:rPr>
-              <a:t>10 sem.</a:t>
-            </a:r>
-            <a:endParaRPr b="0" lang="en-US" sz="800" spc="-1" strike="noStrike">
-              <a:solidFill>
-                <a:srgbClr val="000000"/>
-              </a:solidFill>
-              <a:latin typeface="Arial"/>
-            </a:endParaRPr>
-          </a:p>
-        </p:txBody>
-      </p:sp>
-      <p:sp>
-        <p:nvSpPr>
-          <p:cNvPr id="105" name="Text 27"/>
-          <p:cNvSpPr/>
-          <p:nvPr/>
-        </p:nvSpPr>
-        <p:spPr>
-          <a:xfrm>
-            <a:off x="6583680" y="3191400"/>
-            <a:ext cx="1279440" cy="319320"/>
+            <a:endParaRPr b="0" lang="en-US" sz="1800" spc="-1" strike="noStrike">
+              <a:solidFill>
+                <a:srgbClr val="000000"/>
+              </a:solidFill>
+              <a:latin typeface="Arial"/>
+              <a:ea typeface="DejaVu Sans"/>
+            </a:endParaRPr>
+          </a:p>
+        </p:txBody>
+      </p:sp>
+      <p:sp>
+        <p:nvSpPr>
+          <p:cNvPr id="109" name="Text 45"/>
+          <p:cNvSpPr/>
+          <p:nvPr/>
+        </p:nvSpPr>
+        <p:spPr>
+          <a:xfrm>
+            <a:off x="6446520" y="4343400"/>
+            <a:ext cx="2467440" cy="638640"/>
           </a:xfrm>
           <a:prstGeom prst="rect">
             <a:avLst/>
@@ -7691,575 +8306,39 @@
             <a:noAutofit/>
           </a:bodyPr>
           <a:p>
-            <a:pPr algn="ctr" defTabSz="914400">
-              <a:lnSpc>
-                <a:spcPct val="100000"/>
-              </a:lnSpc>
-              <a:tabLst>
-                <a:tab algn="l" pos="0"/>
-              </a:tabLst>
-            </a:pPr>
-            <a:r>
-              <a:rPr b="1" lang="en-US" sz="800" spc="-1" strike="noStrike">
-                <a:solidFill>
-                  <a:srgbClr val="ffffff"/>
-                </a:solidFill>
-                <a:latin typeface="Calibri"/>
-              </a:rPr>
-              <a:t>4 sem.</a:t>
-            </a:r>
-            <a:endParaRPr b="0" lang="en-US" sz="800" spc="-1" strike="noStrike">
-              <a:solidFill>
-                <a:srgbClr val="000000"/>
-              </a:solidFill>
-              <a:latin typeface="Arial"/>
-            </a:endParaRPr>
-          </a:p>
-        </p:txBody>
-      </p:sp>
-      <p:sp>
-        <p:nvSpPr>
-          <p:cNvPr id="106" name="Text 32"/>
-          <p:cNvSpPr/>
-          <p:nvPr/>
-        </p:nvSpPr>
-        <p:spPr>
-          <a:xfrm>
-            <a:off x="7863840" y="4032360"/>
-            <a:ext cx="959400" cy="319320"/>
-          </a:xfrm>
-          <a:prstGeom prst="rect">
-            <a:avLst/>
-          </a:prstGeom>
-          <a:noFill/>
-          <a:ln w="0">
-            <a:noFill/>
-          </a:ln>
-        </p:spPr>
-        <p:style>
-          <a:lnRef idx="0"/>
-          <a:fillRef idx="0"/>
-          <a:effectRef idx="0"/>
-          <a:fontRef idx="minor"/>
-        </p:style>
-        <p:txBody>
-          <a:bodyPr lIns="0" rIns="0" tIns="0" bIns="0" anchor="ctr">
-            <a:noAutofit/>
-          </a:bodyPr>
-          <a:p>
-            <a:pPr algn="ctr" defTabSz="914400">
-              <a:lnSpc>
-                <a:spcPct val="100000"/>
-              </a:lnSpc>
-              <a:tabLst>
-                <a:tab algn="l" pos="0"/>
-              </a:tabLst>
-            </a:pPr>
-            <a:r>
-              <a:rPr b="1" lang="en-US" sz="800" spc="-1" strike="noStrike">
-                <a:solidFill>
-                  <a:srgbClr val="ffffff"/>
-                </a:solidFill>
-                <a:latin typeface="Calibri"/>
-              </a:rPr>
-              <a:t>2 sem.</a:t>
-            </a:r>
-            <a:endParaRPr b="0" lang="en-US" sz="800" spc="-1" strike="noStrike">
-              <a:solidFill>
-                <a:srgbClr val="000000"/>
-              </a:solidFill>
-              <a:latin typeface="Arial"/>
-            </a:endParaRPr>
-          </a:p>
-        </p:txBody>
-      </p:sp>
-      <p:sp>
-        <p:nvSpPr>
-          <p:cNvPr id="107" name=""/>
-          <p:cNvSpPr/>
-          <p:nvPr/>
-        </p:nvSpPr>
-        <p:spPr>
-          <a:xfrm>
-            <a:off x="914400" y="776880"/>
-            <a:ext cx="6629040" cy="228240"/>
-          </a:xfrm>
-          <a:prstGeom prst="rect">
-            <a:avLst/>
-          </a:prstGeom>
-          <a:solidFill>
-            <a:srgbClr val="102cb2"/>
-          </a:solidFill>
-          <a:ln w="0">
-            <a:solidFill>
-              <a:srgbClr val="3465a4"/>
-            </a:solidFill>
-          </a:ln>
-        </p:spPr>
-        <p:style>
-          <a:lnRef idx="0"/>
-          <a:fillRef idx="0"/>
-          <a:effectRef idx="0"/>
-          <a:fontRef idx="minor"/>
-        </p:style>
-        <p:txBody>
-          <a:bodyPr lIns="90000" rIns="90000" tIns="45000" bIns="45000" anchor="ctr">
-            <a:noAutofit/>
-          </a:bodyPr>
-          <a:p>
-            <a:pPr algn="ctr">
-              <a:lnSpc>
-                <a:spcPct val="100000"/>
-              </a:lnSpc>
-            </a:pPr>
-            <a:r>
-              <a:rPr b="0" lang="en-US" sz="1800" spc="-1" strike="noStrike">
-                <a:solidFill>
-                  <a:srgbClr val="ffffff"/>
-                </a:solidFill>
-                <a:latin typeface="Arial"/>
-              </a:rPr>
-              <a:t>Qui peut utiliser cette application ?</a:t>
-            </a:r>
             <a:endParaRPr b="0" lang="en-US" sz="1800" spc="-1" strike="noStrike">
               <a:solidFill>
-                <a:srgbClr val="ffffff"/>
-              </a:solidFill>
-              <a:latin typeface="Arial"/>
-            </a:endParaRPr>
-          </a:p>
-        </p:txBody>
-      </p:sp>
-      <p:sp>
-        <p:nvSpPr>
-          <p:cNvPr id="108" name=""/>
-          <p:cNvSpPr/>
-          <p:nvPr/>
-        </p:nvSpPr>
-        <p:spPr>
-          <a:xfrm>
-            <a:off x="228600" y="1032840"/>
-            <a:ext cx="8457840" cy="1024200"/>
-          </a:xfrm>
-          <a:prstGeom prst="rect">
-            <a:avLst/>
-          </a:prstGeom>
-          <a:solidFill>
-            <a:srgbClr val="ffffff"/>
-          </a:solidFill>
-          <a:ln w="0">
-            <a:solidFill>
-              <a:srgbClr val="3465a4"/>
-            </a:solidFill>
-          </a:ln>
-        </p:spPr>
-        <p:style>
-          <a:lnRef idx="0"/>
-          <a:fillRef idx="0"/>
-          <a:effectRef idx="0"/>
-          <a:fontRef idx="minor"/>
-        </p:style>
-        <p:txBody>
-          <a:bodyPr lIns="90000" rIns="90000" tIns="45000" bIns="45000" anchor="ctr">
-            <a:noAutofit/>
-          </a:bodyPr>
-          <a:p>
-            <a:pPr algn="ctr">
-              <a:lnSpc>
-                <a:spcPct val="100000"/>
-              </a:lnSpc>
-            </a:pPr>
-            <a:r>
-              <a:rPr b="0" lang="en-US" sz="1800" spc="-1" strike="noStrike">
-                <a:solidFill>
-                  <a:srgbClr val="000000"/>
-                </a:solidFill>
-                <a:latin typeface="Arial"/>
-              </a:rPr>
-              <a:t>Administrateur</a:t>
-            </a:r>
-            <a:endParaRPr b="0" lang="en-US" sz="1800" spc="-1" strike="noStrike">
-              <a:solidFill>
-                <a:srgbClr val="000000"/>
-              </a:solidFill>
-              <a:latin typeface="Arial"/>
-            </a:endParaRPr>
-          </a:p>
-          <a:p>
-            <a:pPr algn="ctr">
-              <a:lnSpc>
-                <a:spcPct val="100000"/>
-              </a:lnSpc>
-            </a:pPr>
-            <a:r>
-              <a:rPr b="0" lang="en-US" sz="1800" spc="-1" strike="noStrike">
-                <a:solidFill>
-                  <a:srgbClr val="000000"/>
-                </a:solidFill>
-                <a:latin typeface="Arial"/>
-              </a:rPr>
-              <a:t>Bibliothècaire</a:t>
-            </a:r>
-            <a:endParaRPr b="0" lang="en-US" sz="1800" spc="-1" strike="noStrike">
-              <a:solidFill>
-                <a:srgbClr val="000000"/>
-              </a:solidFill>
-              <a:latin typeface="Arial"/>
-            </a:endParaRPr>
-          </a:p>
-          <a:p>
-            <a:pPr algn="ctr">
-              <a:lnSpc>
-                <a:spcPct val="100000"/>
-              </a:lnSpc>
-            </a:pPr>
-            <a:r>
-              <a:rPr b="0" lang="en-US" sz="1800" spc="-1" strike="noStrike">
-                <a:solidFill>
-                  <a:srgbClr val="000000"/>
-                </a:solidFill>
-                <a:latin typeface="Arial"/>
-              </a:rPr>
-              <a:t>Adhérent</a:t>
-            </a:r>
-            <a:endParaRPr b="0" lang="en-US" sz="1800" spc="-1" strike="noStrike">
-              <a:solidFill>
-                <a:srgbClr val="000000"/>
-              </a:solidFill>
-              <a:latin typeface="Arial"/>
-            </a:endParaRPr>
-          </a:p>
-        </p:txBody>
-      </p:sp>
-      <p:sp>
-        <p:nvSpPr>
-          <p:cNvPr id="109" name=""/>
-          <p:cNvSpPr/>
-          <p:nvPr/>
-        </p:nvSpPr>
-        <p:spPr>
-          <a:xfrm>
-            <a:off x="866520" y="2238120"/>
-            <a:ext cx="7314840" cy="228240"/>
-          </a:xfrm>
-          <a:prstGeom prst="rect">
-            <a:avLst/>
-          </a:prstGeom>
-          <a:solidFill>
-            <a:srgbClr val="102cb2"/>
-          </a:solidFill>
-          <a:ln w="0">
-            <a:solidFill>
-              <a:srgbClr val="3465a4"/>
-            </a:solidFill>
-          </a:ln>
-        </p:spPr>
-        <p:style>
-          <a:lnRef idx="0"/>
-          <a:fillRef idx="0"/>
-          <a:effectRef idx="0"/>
-          <a:fontRef idx="minor"/>
-        </p:style>
-        <p:txBody>
-          <a:bodyPr lIns="90000" rIns="90000" tIns="45000" bIns="45000" anchor="ctr">
-            <a:noAutofit/>
-          </a:bodyPr>
-          <a:p>
-            <a:pPr algn="ctr">
-              <a:lnSpc>
-                <a:spcPct val="100000"/>
-              </a:lnSpc>
-            </a:pPr>
-            <a:r>
-              <a:rPr b="0" lang="en-US" sz="1800" spc="-1" strike="noStrike">
-                <a:solidFill>
-                  <a:srgbClr val="ffffff"/>
-                </a:solidFill>
-                <a:latin typeface="Arial"/>
-              </a:rPr>
-              <a:t>Les fonctionnalités clés : </a:t>
-            </a:r>
-            <a:endParaRPr b="0" lang="en-US" sz="1800" spc="-1" strike="noStrike">
-              <a:solidFill>
-                <a:srgbClr val="ffffff"/>
-              </a:solidFill>
-              <a:latin typeface="Arial"/>
-            </a:endParaRPr>
-          </a:p>
-        </p:txBody>
-      </p:sp>
-      <p:sp>
-        <p:nvSpPr>
-          <p:cNvPr id="110" name=""/>
-          <p:cNvSpPr/>
-          <p:nvPr/>
-        </p:nvSpPr>
-        <p:spPr>
-          <a:xfrm>
-            <a:off x="457200" y="2514600"/>
-            <a:ext cx="8457840" cy="2285640"/>
-          </a:xfrm>
-          <a:prstGeom prst="rect">
-            <a:avLst/>
-          </a:prstGeom>
-          <a:solidFill>
-            <a:srgbClr val="ffffff"/>
-          </a:solidFill>
-          <a:ln w="0">
-            <a:solidFill>
-              <a:srgbClr val="3465a4"/>
-            </a:solidFill>
-          </a:ln>
-        </p:spPr>
-        <p:style>
-          <a:lnRef idx="0"/>
-          <a:fillRef idx="0"/>
-          <a:effectRef idx="0"/>
-          <a:fontRef idx="minor"/>
-        </p:style>
-        <p:txBody>
-          <a:bodyPr lIns="90000" rIns="90000" tIns="45000" bIns="45000" anchor="ctr">
-            <a:noAutofit/>
-          </a:bodyPr>
-          <a:p>
-            <a:pPr marL="216000" indent="-216000" algn="ctr">
-              <a:lnSpc>
-                <a:spcPct val="100000"/>
-              </a:lnSpc>
-              <a:buClr>
-                <a:srgbClr val="000000"/>
-              </a:buClr>
-              <a:buSzPct val="45000"/>
-              <a:buFont typeface="Wingdings" charset="2"/>
-              <a:buChar char=""/>
-            </a:pPr>
-            <a:r>
-              <a:rPr b="0" lang="en-US" sz="1800" spc="-1" strike="noStrike">
-                <a:solidFill>
-                  <a:srgbClr val="000000"/>
-                </a:solidFill>
-                <a:latin typeface="Arial"/>
-              </a:rPr>
-              <a:t>Ajout, modifications, suppresion du livre</a:t>
-            </a:r>
-            <a:endParaRPr b="0" lang="en-US" sz="1800" spc="-1" strike="noStrike">
-              <a:solidFill>
-                <a:srgbClr val="000000"/>
-              </a:solidFill>
-              <a:latin typeface="Arial"/>
-            </a:endParaRPr>
-          </a:p>
-          <a:p>
-            <a:pPr marL="216000" indent="-216000" algn="ctr">
-              <a:lnSpc>
-                <a:spcPct val="100000"/>
-              </a:lnSpc>
-              <a:buClr>
-                <a:srgbClr val="000000"/>
-              </a:buClr>
-              <a:buSzPct val="45000"/>
-              <a:buFont typeface="Wingdings" charset="2"/>
-              <a:buChar char=""/>
-            </a:pPr>
-            <a:r>
-              <a:rPr b="0" lang="en-US" sz="1800" spc="-1" strike="noStrike">
-                <a:solidFill>
-                  <a:srgbClr val="000000"/>
-                </a:solidFill>
-                <a:latin typeface="Arial"/>
-              </a:rPr>
-              <a:t>Recherche rapide des livres</a:t>
-            </a:r>
-            <a:endParaRPr b="0" lang="en-US" sz="1800" spc="-1" strike="noStrike">
-              <a:solidFill>
-                <a:srgbClr val="000000"/>
-              </a:solidFill>
-              <a:latin typeface="Arial"/>
-            </a:endParaRPr>
-          </a:p>
-          <a:p>
-            <a:pPr marL="216000" indent="-216000" algn="ctr">
-              <a:lnSpc>
-                <a:spcPct val="100000"/>
-              </a:lnSpc>
-              <a:buClr>
-                <a:srgbClr val="000000"/>
-              </a:buClr>
-              <a:buSzPct val="45000"/>
-              <a:buFont typeface="Wingdings" charset="2"/>
-              <a:buChar char=""/>
-            </a:pPr>
-            <a:r>
-              <a:rPr b="0" lang="en-US" sz="1800" spc="-1" strike="noStrike">
-                <a:solidFill>
-                  <a:srgbClr val="000000"/>
-                </a:solidFill>
-                <a:latin typeface="Arial"/>
-              </a:rPr>
-              <a:t>Gestion des emprunts et retour</a:t>
-            </a:r>
-            <a:endParaRPr b="0" lang="en-US" sz="1800" spc="-1" strike="noStrike">
-              <a:solidFill>
-                <a:srgbClr val="000000"/>
-              </a:solidFill>
-              <a:latin typeface="Arial"/>
-            </a:endParaRPr>
-          </a:p>
-          <a:p>
-            <a:pPr marL="216000" indent="-216000" algn="ctr">
-              <a:lnSpc>
-                <a:spcPct val="100000"/>
-              </a:lnSpc>
-              <a:buClr>
-                <a:srgbClr val="000000"/>
-              </a:buClr>
-              <a:buSzPct val="45000"/>
-              <a:buFont typeface="Wingdings" charset="2"/>
-              <a:buChar char=""/>
-            </a:pPr>
-            <a:r>
-              <a:rPr b="0" lang="en-US" sz="1800" spc="-1" strike="noStrike">
-                <a:solidFill>
-                  <a:srgbClr val="000000"/>
-                </a:solidFill>
-                <a:latin typeface="Arial"/>
-              </a:rPr>
-              <a:t>Notification / Rappel automatique par email</a:t>
-            </a:r>
-            <a:endParaRPr b="0" lang="en-US" sz="1800" spc="-1" strike="noStrike">
-              <a:solidFill>
-                <a:srgbClr val="000000"/>
-              </a:solidFill>
-              <a:latin typeface="Arial"/>
-            </a:endParaRPr>
-          </a:p>
-          <a:p>
-            <a:pPr marL="216000" indent="-216000" algn="ctr">
-              <a:lnSpc>
-                <a:spcPct val="100000"/>
-              </a:lnSpc>
-              <a:buClr>
-                <a:srgbClr val="000000"/>
-              </a:buClr>
-              <a:buSzPct val="45000"/>
-              <a:buFont typeface="Wingdings" charset="2"/>
-              <a:buChar char=""/>
-            </a:pPr>
-            <a:r>
-              <a:rPr b="0" lang="en-US" sz="1800" spc="-1" strike="noStrike">
-                <a:solidFill>
-                  <a:srgbClr val="000000"/>
-                </a:solidFill>
-                <a:latin typeface="Arial"/>
-              </a:rPr>
-              <a:t>Tableau de bord dynamique</a:t>
-            </a:r>
-            <a:endParaRPr b="0" lang="en-US" sz="1800" spc="-1" strike="noStrike">
-              <a:solidFill>
-                <a:srgbClr val="000000"/>
-              </a:solidFill>
-              <a:latin typeface="Arial"/>
-            </a:endParaRPr>
-          </a:p>
-          <a:p>
-            <a:pPr marL="216000" indent="-216000" algn="ctr">
-              <a:lnSpc>
-                <a:spcPct val="100000"/>
-              </a:lnSpc>
-              <a:buClr>
-                <a:srgbClr val="000000"/>
-              </a:buClr>
-              <a:buSzPct val="45000"/>
-              <a:buFont typeface="Wingdings" charset="2"/>
-              <a:buChar char=""/>
-            </a:pPr>
-            <a:r>
-              <a:rPr b="0" lang="en-US" sz="1800" spc="-1" strike="noStrike">
-                <a:solidFill>
-                  <a:srgbClr val="000000"/>
-                </a:solidFill>
-                <a:latin typeface="Arial"/>
-              </a:rPr>
-              <a:t>Assistant virtuel intégré pour l’adhérent</a:t>
-            </a:r>
-            <a:endParaRPr b="0" lang="en-US" sz="1800" spc="-1" strike="noStrike">
-              <a:solidFill>
-                <a:srgbClr val="000000"/>
-              </a:solidFill>
-              <a:latin typeface="Arial"/>
-            </a:endParaRPr>
-          </a:p>
-          <a:p>
-            <a:pPr marL="216000" indent="-216000" algn="ctr">
-              <a:lnSpc>
-                <a:spcPct val="100000"/>
-              </a:lnSpc>
-              <a:buClr>
-                <a:srgbClr val="000000"/>
-              </a:buClr>
-              <a:buSzPct val="45000"/>
-              <a:buFont typeface="Wingdings" charset="2"/>
-              <a:buChar char=""/>
-            </a:pPr>
-            <a:r>
-              <a:rPr b="0" lang="en-US" sz="1800" spc="-1" strike="noStrike">
-                <a:solidFill>
-                  <a:srgbClr val="000000"/>
-                </a:solidFill>
-                <a:latin typeface="Arial"/>
-              </a:rPr>
-              <a:t>Centre d’aide pour l’adhérent</a:t>
-            </a:r>
-            <a:endParaRPr b="0" lang="en-US" sz="1800" spc="-1" strike="noStrike">
-              <a:solidFill>
-                <a:srgbClr val="000000"/>
-              </a:solidFill>
-              <a:latin typeface="Arial"/>
-            </a:endParaRPr>
-          </a:p>
-          <a:p>
-            <a:pPr marL="216000" indent="-216000" algn="ctr">
-              <a:lnSpc>
-                <a:spcPct val="100000"/>
-              </a:lnSpc>
-              <a:buClr>
-                <a:srgbClr val="000000"/>
-              </a:buClr>
-              <a:buSzPct val="45000"/>
-              <a:buFont typeface="Wingdings" charset="2"/>
-              <a:buChar char=""/>
-            </a:pPr>
-            <a:r>
-              <a:rPr b="0" lang="en-US" sz="1800" spc="-1" strike="noStrike">
-                <a:solidFill>
-                  <a:srgbClr val="000000"/>
-                </a:solidFill>
-                <a:latin typeface="Arial"/>
-              </a:rPr>
-              <a:t>Accès sécurisé</a:t>
-            </a:r>
-            <a:endParaRPr b="0" lang="en-US" sz="1800" spc="-1" strike="noStrike">
-              <a:solidFill>
-                <a:srgbClr val="000000"/>
-              </a:solidFill>
-              <a:latin typeface="Arial"/>
-            </a:endParaRPr>
-          </a:p>
-          <a:p>
-            <a:pPr algn="ctr">
-              <a:lnSpc>
-                <a:spcPct val="100000"/>
-              </a:lnSpc>
-            </a:pPr>
-            <a:endParaRPr b="0" lang="en-US" sz="1800" spc="-1" strike="noStrike">
-              <a:solidFill>
-                <a:srgbClr val="000000"/>
-              </a:solidFill>
-              <a:latin typeface="Arial"/>
-            </a:endParaRPr>
-          </a:p>
-        </p:txBody>
-      </p:sp>
+                <a:srgbClr val="000000"/>
+              </a:solidFill>
+              <a:latin typeface="Arial"/>
+              <a:ea typeface="DejaVu Sans"/>
+            </a:endParaRPr>
+          </a:p>
+        </p:txBody>
+      </p:sp>
+      <p:pic>
+        <p:nvPicPr>
+          <p:cNvPr id="110" name="" descr=""/>
+          <p:cNvPicPr/>
+          <p:nvPr/>
+        </p:nvPicPr>
+        <p:blipFill>
+          <a:blip r:embed="rId1"/>
+          <a:stretch/>
+        </p:blipFill>
+        <p:spPr>
+          <a:xfrm>
+            <a:off x="732240" y="1600200"/>
+            <a:ext cx="7717320" cy="2474280"/>
+          </a:xfrm>
+          <a:prstGeom prst="rect">
+            <a:avLst/>
+          </a:prstGeom>
+          <a:ln w="0">
+            <a:noFill/>
+          </a:ln>
+        </p:spPr>
+      </p:pic>
     </p:spTree>
   </p:cSld>
   <mc:AlternateContent>
@@ -8306,7 +8385,7 @@
         <p:spPr>
           <a:xfrm>
             <a:off x="0" y="0"/>
-            <a:ext cx="9143280" cy="776520"/>
+            <a:ext cx="9142560" cy="775800"/>
           </a:xfrm>
           <a:prstGeom prst="rect">
             <a:avLst/>
@@ -8314,7 +8393,7 @@
           <a:solidFill>
             <a:srgbClr val="1e2761"/>
           </a:solidFill>
-          <a:ln w="12700">
+          <a:ln w="12600">
             <a:solidFill>
               <a:srgbClr val="1e2761"/>
             </a:solidFill>
@@ -8342,6 +8421,7 @@
                 <a:srgbClr val="ffffff"/>
               </a:solidFill>
               <a:latin typeface="Arial"/>
+              <a:ea typeface="DejaVu Sans"/>
             </a:endParaRPr>
           </a:p>
         </p:txBody>
@@ -8355,7 +8435,7 @@
         <p:spPr>
           <a:xfrm>
             <a:off x="365760" y="0"/>
-            <a:ext cx="8228880" cy="776520"/>
+            <a:ext cx="8228160" cy="775800"/>
           </a:xfrm>
           <a:prstGeom prst="rect">
             <a:avLst/>
@@ -8390,8 +8470,9 @@
                   <a:srgbClr val="ffffff"/>
                 </a:solidFill>
                 <a:latin typeface="Calibri"/>
-              </a:rPr>
-              <a:t>03  |  Point fort et point faibles</a:t>
+                <a:ea typeface="DejaVu Sans"/>
+              </a:rPr>
+              <a:t>05  |  Point fort et point faibles</a:t>
             </a:r>
             <a:endParaRPr b="0" lang="en-US" sz="1800" spc="-1" strike="noStrike">
               <a:solidFill>
@@ -8411,7 +8492,7 @@
         <p:spPr>
           <a:xfrm>
             <a:off x="777240" y="4343400"/>
-            <a:ext cx="2468160" cy="639360"/>
+            <a:ext cx="2467440" cy="638640"/>
           </a:xfrm>
           <a:prstGeom prst="rect">
             <a:avLst/>
@@ -8442,6 +8523,7 @@
                 <a:srgbClr val="000000"/>
               </a:solidFill>
               <a:latin typeface="Arial"/>
+              <a:ea typeface="DejaVu Sans"/>
             </a:endParaRPr>
           </a:p>
         </p:txBody>
@@ -8455,7 +8537,7 @@
         <p:spPr>
           <a:xfrm>
             <a:off x="3611880" y="4343400"/>
-            <a:ext cx="2468160" cy="639360"/>
+            <a:ext cx="2467440" cy="638640"/>
           </a:xfrm>
           <a:prstGeom prst="rect">
             <a:avLst/>
@@ -8486,6 +8568,7 @@
                 <a:srgbClr val="000000"/>
               </a:solidFill>
               <a:latin typeface="Arial"/>
+              <a:ea typeface="DejaVu Sans"/>
             </a:endParaRPr>
           </a:p>
         </p:txBody>
@@ -8499,7 +8582,7 @@
         <p:spPr>
           <a:xfrm>
             <a:off x="6446520" y="4343400"/>
-            <a:ext cx="2468160" cy="639360"/>
+            <a:ext cx="2467440" cy="638640"/>
           </a:xfrm>
           <a:prstGeom prst="rect">
             <a:avLst/>
@@ -8530,6 +8613,7 @@
                 <a:srgbClr val="000000"/>
               </a:solidFill>
               <a:latin typeface="Arial"/>
+              <a:ea typeface="DejaVu Sans"/>
             </a:endParaRPr>
           </a:p>
         </p:txBody>
@@ -8543,7 +8627,7 @@
         <p:spPr>
           <a:xfrm>
             <a:off x="228600" y="914400"/>
-            <a:ext cx="8457840" cy="1828440"/>
+            <a:ext cx="8457120" cy="1827720"/>
           </a:xfrm>
           <a:prstGeom prst="rect">
             <a:avLst/>
@@ -8579,6 +8663,7 @@
                   <a:srgbClr val="ffffff"/>
                 </a:solidFill>
                 <a:latin typeface="Arial"/>
+                <a:ea typeface="DejaVu Sans"/>
               </a:rPr>
               <a:t>Gestion rapide et fiable</a:t>
             </a:r>
@@ -8601,6 +8686,7 @@
                   <a:srgbClr val="ffffff"/>
                 </a:solidFill>
                 <a:latin typeface="Arial"/>
+                <a:ea typeface="DejaVu Sans"/>
               </a:rPr>
               <a:t>Centralisation</a:t>
             </a:r>
@@ -8623,6 +8709,7 @@
                   <a:srgbClr val="ffffff"/>
                 </a:solidFill>
                 <a:latin typeface="Arial"/>
+                <a:ea typeface="DejaVu Sans"/>
               </a:rPr>
               <a:t>Suivi en temps réel</a:t>
             </a:r>
@@ -8645,6 +8732,7 @@
                   <a:srgbClr val="ffffff"/>
                 </a:solidFill>
                 <a:latin typeface="Arial"/>
+                <a:ea typeface="DejaVu Sans"/>
               </a:rPr>
               <a:t>Evolutif</a:t>
             </a:r>
@@ -8666,7 +8754,7 @@
         <p:spPr>
           <a:xfrm>
             <a:off x="228600" y="2971800"/>
-            <a:ext cx="8457840" cy="1371240"/>
+            <a:ext cx="8457120" cy="1370520"/>
           </a:xfrm>
           <a:prstGeom prst="rect">
             <a:avLst/>
@@ -8702,6 +8790,7 @@
                   <a:srgbClr val="ffffff"/>
                 </a:solidFill>
                 <a:latin typeface="Arial"/>
+                <a:ea typeface="DejaVu Sans"/>
               </a:rPr>
               <a:t>Dépendance technique</a:t>
             </a:r>
@@ -8724,6 +8813,7 @@
                   <a:srgbClr val="ffffff"/>
                 </a:solidFill>
                 <a:latin typeface="Arial"/>
+                <a:ea typeface="DejaVu Sans"/>
               </a:rPr>
               <a:t>Prise en main</a:t>
             </a:r>
@@ -8795,7 +8885,7 @@
         <p:spPr>
           <a:xfrm>
             <a:off x="0" y="0"/>
-            <a:ext cx="9143280" cy="776520"/>
+            <a:ext cx="9142560" cy="775800"/>
           </a:xfrm>
           <a:prstGeom prst="rect">
             <a:avLst/>
@@ -8803,7 +8893,7 @@
           <a:solidFill>
             <a:srgbClr val="1e2761"/>
           </a:solidFill>
-          <a:ln w="12700">
+          <a:ln w="12600">
             <a:solidFill>
               <a:srgbClr val="1e2761"/>
             </a:solidFill>
@@ -8831,6 +8921,7 @@
                 <a:srgbClr val="ffffff"/>
               </a:solidFill>
               <a:latin typeface="Arial"/>
+              <a:ea typeface="DejaVu Sans"/>
             </a:endParaRPr>
           </a:p>
         </p:txBody>
@@ -8844,7 +8935,7 @@
         <p:spPr>
           <a:xfrm>
             <a:off x="365760" y="0"/>
-            <a:ext cx="8228880" cy="776520"/>
+            <a:ext cx="8228160" cy="775800"/>
           </a:xfrm>
           <a:prstGeom prst="rect">
             <a:avLst/>
@@ -8879,6 +8970,7 @@
                   <a:srgbClr val="ffffff"/>
                 </a:solidFill>
                 <a:latin typeface="Calibri"/>
+                <a:ea typeface="DejaVu Sans"/>
               </a:rPr>
               <a:t>06  |  Prochaîne étapes</a:t>
             </a:r>
@@ -8900,7 +8992,7 @@
         <p:spPr>
           <a:xfrm>
             <a:off x="777240" y="4343400"/>
-            <a:ext cx="2468160" cy="639360"/>
+            <a:ext cx="2467440" cy="638640"/>
           </a:xfrm>
           <a:prstGeom prst="rect">
             <a:avLst/>
@@ -8931,6 +9023,7 @@
                 <a:srgbClr val="000000"/>
               </a:solidFill>
               <a:latin typeface="Arial"/>
+              <a:ea typeface="DejaVu Sans"/>
             </a:endParaRPr>
           </a:p>
         </p:txBody>
@@ -8944,7 +9037,7 @@
         <p:spPr>
           <a:xfrm>
             <a:off x="3611880" y="4343400"/>
-            <a:ext cx="2468160" cy="639360"/>
+            <a:ext cx="2467440" cy="638640"/>
           </a:xfrm>
           <a:prstGeom prst="rect">
             <a:avLst/>
@@ -8975,6 +9068,7 @@
                 <a:srgbClr val="000000"/>
               </a:solidFill>
               <a:latin typeface="Arial"/>
+              <a:ea typeface="DejaVu Sans"/>
             </a:endParaRPr>
           </a:p>
         </p:txBody>
@@ -8988,7 +9082,7 @@
         <p:spPr>
           <a:xfrm>
             <a:off x="6446520" y="4343400"/>
-            <a:ext cx="2468160" cy="639360"/>
+            <a:ext cx="2467440" cy="638640"/>
           </a:xfrm>
           <a:prstGeom prst="rect">
             <a:avLst/>
@@ -9019,6 +9113,7 @@
                 <a:srgbClr val="000000"/>
               </a:solidFill>
               <a:latin typeface="Arial"/>
+              <a:ea typeface="DejaVu Sans"/>
             </a:endParaRPr>
           </a:p>
         </p:txBody>
@@ -9032,7 +9127,7 @@
         <p:spPr>
           <a:xfrm>
             <a:off x="228600" y="914400"/>
-            <a:ext cx="8457840" cy="1828440"/>
+            <a:ext cx="8457120" cy="1827720"/>
           </a:xfrm>
           <a:prstGeom prst="rect">
             <a:avLst/>
@@ -9068,6 +9163,7 @@
                   <a:srgbClr val="ffffff"/>
                 </a:solidFill>
                 <a:latin typeface="Arial"/>
+                <a:ea typeface="DejaVu Sans"/>
               </a:rPr>
               <a:t>Vision court terme</a:t>
             </a:r>
@@ -9090,6 +9186,7 @@
                   <a:srgbClr val="ffffff"/>
                 </a:solidFill>
                 <a:latin typeface="Arial"/>
+                <a:ea typeface="DejaVu Sans"/>
               </a:rPr>
               <a:t>Améliorer l’interface</a:t>
             </a:r>
@@ -9112,6 +9209,7 @@
                   <a:srgbClr val="ffffff"/>
                 </a:solidFill>
                 <a:latin typeface="Arial"/>
+                <a:ea typeface="DejaVu Sans"/>
               </a:rPr>
               <a:t>Ajout autres fonctionnalités (favoris, suivi des retards, …)</a:t>
             </a:r>
@@ -9134,6 +9232,7 @@
                   <a:srgbClr val="ffffff"/>
                 </a:solidFill>
                 <a:latin typeface="Arial"/>
+                <a:ea typeface="DejaVu Sans"/>
               </a:rPr>
               <a:t>Offrir aux utilisateurs le contrôle total de leur compte</a:t>
             </a:r>
@@ -9155,7 +9254,7 @@
         <p:spPr>
           <a:xfrm>
             <a:off x="228600" y="2971800"/>
-            <a:ext cx="8457840" cy="1828440"/>
+            <a:ext cx="8457120" cy="1827720"/>
           </a:xfrm>
           <a:prstGeom prst="rect">
             <a:avLst/>
@@ -9191,6 +9290,7 @@
                   <a:srgbClr val="ffffff"/>
                 </a:solidFill>
                 <a:latin typeface="Arial"/>
+                <a:ea typeface="DejaVu Sans"/>
               </a:rPr>
               <a:t>Vision long terme:</a:t>
             </a:r>
@@ -9226,6 +9326,7 @@
                   <a:srgbClr val="ffffff"/>
                 </a:solidFill>
                 <a:latin typeface="Arial"/>
+                <a:ea typeface="DejaVu Sans"/>
               </a:rPr>
               <a:t>Proposer des livres similaires quand un adhérent rend un livre qu'il a aimé</a:t>
             </a:r>
@@ -9248,6 +9349,7 @@
                   <a:srgbClr val="ffffff"/>
                 </a:solidFill>
                 <a:latin typeface="Arial"/>
+                <a:ea typeface="DejaVu Sans"/>
               </a:rPr>
               <a:t>Recompenser les lecteurs qui a lu le plus  de livre à la fin de l'année scolaire</a:t>
             </a:r>
@@ -9270,6 +9372,7 @@
                   <a:srgbClr val="ffffff"/>
                 </a:solidFill>
                 <a:latin typeface="Arial"/>
+                <a:ea typeface="DejaVu Sans"/>
               </a:rPr>
               <a:t>Recueillir les avis et suggestions des adhérents pour faire évoluer l'application selon leurs besoins</a:t>
             </a:r>
@@ -9328,7 +9431,7 @@
         <p:spPr>
           <a:xfrm>
             <a:off x="-914400" y="-914400"/>
-            <a:ext cx="5485680" cy="5485680"/>
+            <a:ext cx="5484960" cy="5484960"/>
           </a:xfrm>
           <a:prstGeom prst="ellipse">
             <a:avLst/>
@@ -9338,7 +9441,7 @@
               <a:alpha val="7000"/>
             </a:srgbClr>
           </a:solidFill>
-          <a:ln w="12700">
+          <a:ln w="12600">
             <a:solidFill>
               <a:srgbClr val="ffffff">
                 <a:alpha val="7000"/>
@@ -9368,6 +9471,7 @@
                 <a:srgbClr val="000000"/>
               </a:solidFill>
               <a:latin typeface="Arial"/>
+              <a:ea typeface="DejaVu Sans"/>
             </a:endParaRPr>
           </a:p>
         </p:txBody>
@@ -9381,7 +9485,7 @@
         <p:spPr>
           <a:xfrm>
             <a:off x="5486400" y="1828800"/>
-            <a:ext cx="4571280" cy="4571280"/>
+            <a:ext cx="4570560" cy="4570560"/>
           </a:xfrm>
           <a:prstGeom prst="ellipse">
             <a:avLst/>
@@ -9391,7 +9495,7 @@
               <a:alpha val="10000"/>
             </a:srgbClr>
           </a:solidFill>
-          <a:ln w="12700">
+          <a:ln w="12600">
             <a:solidFill>
               <a:srgbClr val="ffffff">
                 <a:alpha val="10000"/>
@@ -9421,6 +9525,7 @@
                 <a:srgbClr val="000000"/>
               </a:solidFill>
               <a:latin typeface="Arial"/>
+              <a:ea typeface="DejaVu Sans"/>
             </a:endParaRPr>
           </a:p>
         </p:txBody>
@@ -9434,7 +9539,7 @@
         <p:spPr>
           <a:xfrm>
             <a:off x="0" y="0"/>
-            <a:ext cx="163800" cy="5142960"/>
+            <a:ext cx="163080" cy="5142240"/>
           </a:xfrm>
           <a:prstGeom prst="rect">
             <a:avLst/>
@@ -9442,7 +9547,7 @@
           <a:solidFill>
             <a:srgbClr val="4fc3f7"/>
           </a:solidFill>
-          <a:ln w="12700">
+          <a:ln w="12600">
             <a:solidFill>
               <a:srgbClr val="4fc3f7"/>
             </a:solidFill>
@@ -9470,6 +9575,7 @@
                 <a:srgbClr val="000000"/>
               </a:solidFill>
               <a:latin typeface="Arial"/>
+              <a:ea typeface="DejaVu Sans"/>
             </a:endParaRPr>
           </a:p>
         </p:txBody>
@@ -9483,7 +9589,7 @@
         <p:spPr>
           <a:xfrm>
             <a:off x="457200" y="822960"/>
-            <a:ext cx="4571280" cy="346680"/>
+            <a:ext cx="4570560" cy="345960"/>
           </a:xfrm>
           <a:prstGeom prst="rect">
             <a:avLst/>
@@ -9518,6 +9624,7 @@
                   <a:srgbClr val="4fc3f7"/>
                 </a:solidFill>
                 <a:latin typeface="Calibri"/>
+                <a:ea typeface="DejaVu Sans"/>
               </a:rPr>
               <a:t>CONCLUSION</a:t>
             </a:r>
@@ -9539,7 +9646,7 @@
         <p:spPr>
           <a:xfrm>
             <a:off x="457200" y="1188720"/>
-            <a:ext cx="5942880" cy="1645200"/>
+            <a:ext cx="5942160" cy="1644480"/>
           </a:xfrm>
           <a:prstGeom prst="rect">
             <a:avLst/>
@@ -9648,7 +9755,7 @@
         <p:spPr>
           <a:xfrm>
             <a:off x="457200" y="2926080"/>
-            <a:ext cx="6400080" cy="346680"/>
+            <a:ext cx="6399360" cy="345960"/>
           </a:xfrm>
           <a:prstGeom prst="rect">
             <a:avLst/>
@@ -9683,6 +9790,7 @@
                   <a:srgbClr val="cadcfc"/>
                 </a:solidFill>
                 <a:latin typeface="Calibri"/>
+                <a:ea typeface="DejaVu Sans"/>
               </a:rPr>
               <a:t>✓  </a:t>
             </a:r>
@@ -9692,6 +9800,7 @@
                   <a:srgbClr val="cadcfc"/>
                 </a:solidFill>
                 <a:latin typeface="Calibri"/>
+                <a:ea typeface="DejaVu Sans"/>
               </a:rPr>
               <a:t>Solution scalable et sécurisée adaptée à la croissance</a:t>
             </a:r>
@@ -9713,7 +9822,7 @@
         <p:spPr>
           <a:xfrm>
             <a:off x="457200" y="3291840"/>
-            <a:ext cx="6400080" cy="346680"/>
+            <a:ext cx="6399360" cy="345960"/>
           </a:xfrm>
           <a:prstGeom prst="rect">
             <a:avLst/>
@@ -9748,6 +9857,7 @@
                   <a:srgbClr val="cadcfc"/>
                 </a:solidFill>
                 <a:latin typeface="Calibri"/>
+                <a:ea typeface="DejaVu Sans"/>
               </a:rPr>
               <a:t>✓  </a:t>
             </a:r>
@@ -9757,6 +9867,7 @@
                   <a:srgbClr val="cadcfc"/>
                 </a:solidFill>
                 <a:latin typeface="Calibri"/>
+                <a:ea typeface="DejaVu Sans"/>
               </a:rPr>
               <a:t>Facilite la tâche des bibliothécaire</a:t>
             </a:r>
@@ -9778,7 +9889,7 @@
         <p:spPr>
           <a:xfrm>
             <a:off x="457200" y="3657600"/>
-            <a:ext cx="6400080" cy="346680"/>
+            <a:ext cx="6399360" cy="345960"/>
           </a:xfrm>
           <a:prstGeom prst="rect">
             <a:avLst/>
@@ -9813,6 +9924,7 @@
                   <a:srgbClr val="cadcfc"/>
                 </a:solidFill>
                 <a:latin typeface="Calibri"/>
+                <a:ea typeface="DejaVu Sans"/>
               </a:rPr>
               <a:t>✓  </a:t>
             </a:r>
@@ -9822,6 +9934,7 @@
                   <a:srgbClr val="cadcfc"/>
                 </a:solidFill>
                 <a:latin typeface="Calibri"/>
+                <a:ea typeface="DejaVu Sans"/>
               </a:rPr>
               <a:t>Rendre la consulation des livres faciles via la réservation</a:t>
             </a:r>
@@ -9843,7 +9956,7 @@
         <p:spPr>
           <a:xfrm>
             <a:off x="457200" y="4160520"/>
-            <a:ext cx="2925360" cy="621000"/>
+            <a:ext cx="2924640" cy="620280"/>
           </a:xfrm>
           <a:prstGeom prst="rect">
             <a:avLst/>
@@ -9851,7 +9964,7 @@
           <a:solidFill>
             <a:srgbClr val="4fc3f7"/>
           </a:solidFill>
-          <a:ln w="12700">
+          <a:ln w="12600">
             <a:solidFill>
               <a:srgbClr val="4fc3f7"/>
             </a:solidFill>
@@ -9879,6 +9992,7 @@
                 <a:srgbClr val="000000"/>
               </a:solidFill>
               <a:latin typeface="Arial"/>
+              <a:ea typeface="DejaVu Sans"/>
             </a:endParaRPr>
           </a:p>
         </p:txBody>
@@ -9892,7 +10006,7 @@
         <p:spPr>
           <a:xfrm>
             <a:off x="457200" y="4160520"/>
-            <a:ext cx="2925360" cy="621000"/>
+            <a:ext cx="2924640" cy="620280"/>
           </a:xfrm>
           <a:prstGeom prst="rect">
             <a:avLst/>
@@ -9927,6 +10041,7 @@
                   <a:srgbClr val="1e2761"/>
                 </a:solidFill>
                 <a:latin typeface="Calibri"/>
+                <a:ea typeface="DejaVu Sans"/>
               </a:rPr>
               <a:t>Questions &amp; Discussion</a:t>
             </a:r>
@@ -9995,14 +10110,14 @@
     </a:clrScheme>
     <a:fontScheme name="Office">
       <a:majorFont>
-        <a:latin typeface="Calibri Light" panose="020F0302020204030204" pitchFamily="0" charset="1"/>
-        <a:ea typeface=""/>
-        <a:cs typeface=""/>
+        <a:latin typeface="Arial" pitchFamily="0" charset="1"/>
+        <a:ea typeface="DejaVu Sans" pitchFamily="0" charset="1"/>
+        <a:cs typeface="DejaVu Sans" pitchFamily="0" charset="1"/>
       </a:majorFont>
       <a:minorFont>
-        <a:latin typeface="Calibri" panose="020F0502020204030204" pitchFamily="0" charset="1"/>
-        <a:ea typeface=""/>
-        <a:cs typeface=""/>
+        <a:latin typeface="Arial" pitchFamily="0" charset="1"/>
+        <a:ea typeface="DejaVu Sans" pitchFamily="0" charset="1"/>
+        <a:cs typeface="DejaVu Sans" pitchFamily="0" charset="1"/>
       </a:minorFont>
     </a:fontScheme>
     <a:fmtScheme>
@@ -10010,67 +10125,25 @@
         <a:solidFill>
           <a:schemeClr val="phClr"/>
         </a:solidFill>
-        <a:gradFill>
-          <a:gsLst>
-            <a:gs pos="0">
-              <a:schemeClr val="phClr">
-                <a:lumMod val="110000"/>
-                <a:tint val="67000"/>
-              </a:schemeClr>
-            </a:gs>
-            <a:gs pos="50000">
-              <a:schemeClr val="phClr">
-                <a:lumMod val="105000"/>
-                <a:tint val="73000"/>
-              </a:schemeClr>
-            </a:gs>
-            <a:gs pos="100000">
-              <a:schemeClr val="phClr">
-                <a:lumMod val="105000"/>
-                <a:tint val="81000"/>
-              </a:schemeClr>
-            </a:gs>
-          </a:gsLst>
-          <a:lin ang="5400000" scaled="0"/>
-          <a:tileRect l="0" t="0" r="0" b="0"/>
-        </a:gradFill>
-        <a:gradFill>
-          <a:gsLst>
-            <a:gs pos="0">
-              <a:schemeClr val="phClr">
-                <a:lumMod val="102000"/>
-                <a:tint val="94000"/>
-              </a:schemeClr>
-            </a:gs>
-            <a:gs pos="50000">
-              <a:schemeClr val="phClr">
-                <a:lumMod val="100000"/>
-                <a:shade val="100000"/>
-              </a:schemeClr>
-            </a:gs>
-            <a:gs pos="100000">
-              <a:schemeClr val="phClr">
-                <a:lumMod val="99000"/>
-                <a:shade val="78000"/>
-              </a:schemeClr>
-            </a:gs>
-          </a:gsLst>
-          <a:lin ang="5400000" scaled="0"/>
-          <a:tileRect l="0" t="0" r="0" b="0"/>
-        </a:gradFill>
+        <a:solidFill>
+          <a:schemeClr val="phClr"/>
+        </a:solidFill>
+        <a:solidFill>
+          <a:schemeClr val="phClr"/>
+        </a:solidFill>
       </a:fillStyleLst>
       <a:lnStyleLst>
         <a:ln w="6350" cap="flat" cmpd="sng" algn="ctr">
           <a:prstDash val="solid"/>
-          <a:miter lim="800000"/>
+          <a:miter/>
         </a:ln>
-        <a:ln w="12700" cap="flat" cmpd="sng" algn="ctr">
+        <a:ln w="6350" cap="flat" cmpd="sng" algn="ctr">
           <a:prstDash val="solid"/>
-          <a:miter lim="800000"/>
+          <a:miter/>
         </a:ln>
-        <a:ln w="19050" cap="flat" cmpd="sng" algn="ctr">
+        <a:ln w="6350" cap="flat" cmpd="sng" algn="ctr">
           <a:prstDash val="solid"/>
-          <a:miter lim="800000"/>
+          <a:miter/>
         </a:ln>
       </a:lnStyleLst>
       <a:effectStyleLst>
@@ -10089,35 +10162,11 @@
           <a:schemeClr val="phClr"/>
         </a:solidFill>
         <a:solidFill>
-          <a:schemeClr val="phClr">
-            <a:tint val="95000"/>
-          </a:schemeClr>
+          <a:schemeClr val="phClr"/>
         </a:solidFill>
-        <a:gradFill>
-          <a:gsLst>
-            <a:gs pos="0">
-              <a:schemeClr val="phClr">
-                <a:tint val="93000"/>
-                <a:shade val="98000"/>
-                <a:lumMod val="102000"/>
-              </a:schemeClr>
-            </a:gs>
-            <a:gs pos="50000">
-              <a:schemeClr val="phClr">
-                <a:tint val="98000"/>
-                <a:shade val="90000"/>
-                <a:lumMod val="103000"/>
-              </a:schemeClr>
-            </a:gs>
-            <a:gs pos="100000">
-              <a:schemeClr val="phClr">
-                <a:shade val="63000"/>
-              </a:schemeClr>
-            </a:gs>
-          </a:gsLst>
-          <a:lin ang="5400000" scaled="0"/>
-          <a:tileRect l="0" t="0" r="0" b="0"/>
-        </a:gradFill>
+        <a:solidFill>
+          <a:schemeClr val="phClr"/>
+        </a:solidFill>
       </a:bgFillStyleLst>
     </a:fmtScheme>
   </a:themeElements>
@@ -10125,6 +10174,112 @@
 </file>
 
 <file path=ppt/theme/theme2.xml><?xml version="1.0" encoding="utf-8"?>
+<a:theme xmlns:a="http://schemas.openxmlformats.org/drawingml/2006/main" xmlns:r="http://schemas.openxmlformats.org/officeDocument/2006/relationships" name="Office Theme">
+  <a:themeElements>
+    <a:clrScheme name="Office">
+      <a:dk1>
+        <a:srgbClr val="000000"/>
+      </a:dk1>
+      <a:lt1>
+        <a:srgbClr val="ffffff"/>
+      </a:lt1>
+      <a:dk2>
+        <a:srgbClr val="44546a"/>
+      </a:dk2>
+      <a:lt2>
+        <a:srgbClr val="e7e6e6"/>
+      </a:lt2>
+      <a:accent1>
+        <a:srgbClr val="4472c4"/>
+      </a:accent1>
+      <a:accent2>
+        <a:srgbClr val="ed7d31"/>
+      </a:accent2>
+      <a:accent3>
+        <a:srgbClr val="a5a5a5"/>
+      </a:accent3>
+      <a:accent4>
+        <a:srgbClr val="ffc000"/>
+      </a:accent4>
+      <a:accent5>
+        <a:srgbClr val="5b9bd5"/>
+      </a:accent5>
+      <a:accent6>
+        <a:srgbClr val="70ad47"/>
+      </a:accent6>
+      <a:hlink>
+        <a:srgbClr val="0563c1"/>
+      </a:hlink>
+      <a:folHlink>
+        <a:srgbClr val="954f72"/>
+      </a:folHlink>
+    </a:clrScheme>
+    <a:fontScheme name="Office">
+      <a:majorFont>
+        <a:latin typeface="Arial" pitchFamily="0" charset="1"/>
+        <a:ea typeface="DejaVu Sans" pitchFamily="0" charset="1"/>
+        <a:cs typeface="DejaVu Sans" pitchFamily="0" charset="1"/>
+      </a:majorFont>
+      <a:minorFont>
+        <a:latin typeface="Arial" pitchFamily="0" charset="1"/>
+        <a:ea typeface="DejaVu Sans" pitchFamily="0" charset="1"/>
+        <a:cs typeface="DejaVu Sans" pitchFamily="0" charset="1"/>
+      </a:minorFont>
+    </a:fontScheme>
+    <a:fmtScheme>
+      <a:fillStyleLst>
+        <a:solidFill>
+          <a:schemeClr val="phClr"/>
+        </a:solidFill>
+        <a:solidFill>
+          <a:schemeClr val="phClr"/>
+        </a:solidFill>
+        <a:solidFill>
+          <a:schemeClr val="phClr"/>
+        </a:solidFill>
+      </a:fillStyleLst>
+      <a:lnStyleLst>
+        <a:ln w="6350" cap="flat" cmpd="sng" algn="ctr">
+          <a:prstDash val="solid"/>
+          <a:miter/>
+        </a:ln>
+        <a:ln w="6350" cap="flat" cmpd="sng" algn="ctr">
+          <a:prstDash val="solid"/>
+          <a:miter/>
+        </a:ln>
+        <a:ln w="6350" cap="flat" cmpd="sng" algn="ctr">
+          <a:prstDash val="solid"/>
+          <a:miter/>
+        </a:ln>
+      </a:lnStyleLst>
+      <a:effectStyleLst>
+        <a:effectStyle>
+          <a:effectLst/>
+        </a:effectStyle>
+        <a:effectStyle>
+          <a:effectLst/>
+        </a:effectStyle>
+        <a:effectStyle>
+          <a:effectLst/>
+        </a:effectStyle>
+      </a:effectStyleLst>
+      <a:bgFillStyleLst>
+        <a:solidFill>
+          <a:schemeClr val="phClr"/>
+        </a:solidFill>
+        <a:solidFill>
+          <a:schemeClr val="phClr"/>
+        </a:solidFill>
+        <a:solidFill>
+          <a:schemeClr val="phClr"/>
+        </a:solidFill>
+      </a:bgFillStyleLst>
+    </a:fmtScheme>
+  </a:themeElements>
+</a:theme>
+</file>
+
+<file path=ppt/theme/theme3.xml><?xml version="1.0" encoding="utf-8"?>
 <a:theme xmlns:a="http://schemas.openxmlformats.org/drawingml/2006/main" xmlns:r="http://schemas.openxmlformats.org/officeDocument/2006/relationships" name="Office Theme">
   <a:themeElements>
     <a:clrScheme name="LibreOffice">
